--- a/6. Redis, SpringBoot Docker Compose.pptx
+++ b/6. Redis, SpringBoot Docker Compose.pptx
@@ -12,11 +12,14 @@
     <p:sldId id="260" r:id="rId6"/>
     <p:sldId id="261" r:id="rId7"/>
     <p:sldId id="262" r:id="rId8"/>
-    <p:sldId id="263" r:id="rId9"/>
-    <p:sldId id="264" r:id="rId10"/>
+    <p:sldId id="267" r:id="rId9"/>
+    <p:sldId id="263" r:id="rId10"/>
+    <p:sldId id="264" r:id="rId11"/>
+    <p:sldId id="265" r:id="rId12"/>
+    <p:sldId id="266" r:id="rId13"/>
   </p:sldIdLst>
   <p:sldSz cx="12192000" cy="6858000"/>
-  <p:notesSz cx="6858000" cy="9144000"/>
+  <p:notesSz cx="7105650" cy="10236200"/>
   <p:defaultTextStyle>
     <a:defPPr>
       <a:defRPr lang="en-US"/>
@@ -132,8 +135,11 @@
           <p14:sldIdLst>
             <p14:sldId id="261"/>
             <p14:sldId id="262"/>
+            <p14:sldId id="267"/>
             <p14:sldId id="263"/>
             <p14:sldId id="264"/>
+            <p14:sldId id="265"/>
+            <p14:sldId id="266"/>
           </p14:sldIdLst>
         </p14:section>
       </p14:sectionLst>
@@ -3922,6 +3928,741 @@
 </p:sld>
 </file>
 
+<file path=ppt/slides/slide10.xml><?xml version="1.0" encoding="utf-8"?>
+<p:sld xmlns:a="http://schemas.openxmlformats.org/drawingml/2006/main" xmlns:r="http://schemas.openxmlformats.org/officeDocument/2006/relationships" xmlns:p="http://schemas.openxmlformats.org/presentationml/2006/main">
+  <p:cSld>
+    <p:spTree>
+      <p:nvGrpSpPr>
+        <p:cNvPr id="1" name=""/>
+        <p:cNvGrpSpPr/>
+        <p:nvPr/>
+      </p:nvGrpSpPr>
+      <p:grpSpPr>
+        <a:xfrm>
+          <a:off x="0" y="0"/>
+          <a:ext cx="0" cy="0"/>
+          <a:chOff x="0" y="0"/>
+          <a:chExt cx="0" cy="0"/>
+        </a:xfrm>
+      </p:grpSpPr>
+      <p:sp>
+        <p:nvSpPr>
+          <p:cNvPr id="2" name="제목 1">
+            <a:extLst>
+              <a:ext uri="{FF2B5EF4-FFF2-40B4-BE49-F238E27FC236}">
+                <a16:creationId xmlns:a16="http://schemas.microsoft.com/office/drawing/2014/main" id="{B54FB328-5D32-D104-3F4E-070129B32618}"/>
+              </a:ext>
+            </a:extLst>
+          </p:cNvPr>
+          <p:cNvSpPr>
+            <a:spLocks noGrp="1"/>
+          </p:cNvSpPr>
+          <p:nvPr>
+            <p:ph type="title"/>
+          </p:nvPr>
+        </p:nvSpPr>
+        <p:spPr/>
+        <p:txBody>
+          <a:bodyPr>
+            <a:normAutofit/>
+          </a:bodyPr>
+          <a:lstStyle/>
+          <a:p>
+            <a:r>
+              <a:rPr lang="en-US" altLang="ko-KR" sz="4000"/>
+              <a:t>EC2 Redis </a:t>
+            </a:r>
+            <a:r>
+              <a:rPr lang="ko-KR" altLang="en-US" sz="4000"/>
+              <a:t>및 실행중인 애플리케이션 중지</a:t>
+            </a:r>
+          </a:p>
+        </p:txBody>
+      </p:sp>
+      <p:sp>
+        <p:nvSpPr>
+          <p:cNvPr id="4" name="TextBox 3">
+            <a:extLst>
+              <a:ext uri="{FF2B5EF4-FFF2-40B4-BE49-F238E27FC236}">
+                <a16:creationId xmlns:a16="http://schemas.microsoft.com/office/drawing/2014/main" id="{7CB7E580-3C4B-4C12-68BC-2D4A319DCB63}"/>
+              </a:ext>
+            </a:extLst>
+          </p:cNvPr>
+          <p:cNvSpPr txBox="1"/>
+          <p:nvPr/>
+        </p:nvSpPr>
+        <p:spPr>
+          <a:xfrm>
+            <a:off x="1097280" y="1737360"/>
+            <a:ext cx="6096000" cy="1384995"/>
+          </a:xfrm>
+          <a:prstGeom prst="rect">
+            <a:avLst/>
+          </a:prstGeom>
+          <a:noFill/>
+        </p:spPr>
+        <p:txBody>
+          <a:bodyPr wrap="square">
+            <a:spAutoFit/>
+          </a:bodyPr>
+          <a:lstStyle/>
+          <a:p>
+            <a:r>
+              <a:rPr lang="ko-KR" altLang="en-US" sz="1400" b="1">
+                <a:solidFill>
+                  <a:srgbClr val="FF0000"/>
+                </a:solidFill>
+              </a:rPr>
+              <a:t>레디스 중지</a:t>
+            </a:r>
+            <a:endParaRPr lang="en-US" altLang="ko-KR" sz="1400" b="1">
+              <a:solidFill>
+                <a:srgbClr val="FF0000"/>
+              </a:solidFill>
+            </a:endParaRPr>
+          </a:p>
+          <a:p>
+            <a:r>
+              <a:rPr lang="en-US" altLang="ko-KR" sz="1400"/>
+              <a:t>sudo systemctl stop redis</a:t>
+            </a:r>
+          </a:p>
+          <a:p>
+            <a:endParaRPr lang="en-US" altLang="ko-KR" sz="1400"/>
+          </a:p>
+          <a:p>
+            <a:r>
+              <a:rPr lang="ko-KR" altLang="en-US" sz="1400" b="1">
+                <a:solidFill>
+                  <a:srgbClr val="FF0000"/>
+                </a:solidFill>
+              </a:rPr>
+              <a:t>스프링 애플리케이션 중지</a:t>
+            </a:r>
+            <a:endParaRPr lang="en-US" altLang="ko-KR" sz="1400" b="1">
+              <a:solidFill>
+                <a:srgbClr val="FF0000"/>
+              </a:solidFill>
+            </a:endParaRPr>
+          </a:p>
+          <a:p>
+            <a:r>
+              <a:rPr lang="en-US" altLang="ko-KR" sz="1400"/>
+              <a:t>sudo lsof -i:8080</a:t>
+            </a:r>
+          </a:p>
+          <a:p>
+            <a:r>
+              <a:rPr lang="en-US" altLang="ko-KR" sz="1400"/>
+              <a:t>sudo</a:t>
+            </a:r>
+            <a:r>
+              <a:rPr lang="ko-KR" altLang="en-US" sz="1400"/>
+              <a:t> </a:t>
+            </a:r>
+            <a:r>
+              <a:rPr lang="en-US" altLang="ko-KR" sz="1400"/>
+              <a:t>kill -9 {</a:t>
+            </a:r>
+            <a:r>
+              <a:rPr lang="ko-KR" altLang="en-US" sz="1400"/>
+              <a:t>애플리케이션 프로세스 </a:t>
+            </a:r>
+            <a:r>
+              <a:rPr lang="en-US" altLang="ko-KR" sz="1400"/>
+              <a:t>PID}</a:t>
+            </a:r>
+            <a:endParaRPr lang="ko-KR" altLang="en-US" sz="1400"/>
+          </a:p>
+        </p:txBody>
+      </p:sp>
+      <p:pic>
+        <p:nvPicPr>
+          <p:cNvPr id="6" name="그림 5">
+            <a:extLst>
+              <a:ext uri="{FF2B5EF4-FFF2-40B4-BE49-F238E27FC236}">
+                <a16:creationId xmlns:a16="http://schemas.microsoft.com/office/drawing/2014/main" id="{325EE700-5CEB-9EEC-AB37-DA18C1D5EDFB}"/>
+              </a:ext>
+            </a:extLst>
+          </p:cNvPr>
+          <p:cNvPicPr>
+            <a:picLocks noChangeAspect="1"/>
+          </p:cNvPicPr>
+          <p:nvPr/>
+        </p:nvPicPr>
+        <p:blipFill>
+          <a:blip r:embed="rId2"/>
+          <a:stretch>
+            <a:fillRect/>
+          </a:stretch>
+        </p:blipFill>
+        <p:spPr>
+          <a:xfrm>
+            <a:off x="1134960" y="3287908"/>
+            <a:ext cx="6020640" cy="895475"/>
+          </a:xfrm>
+          <a:prstGeom prst="rect">
+            <a:avLst/>
+          </a:prstGeom>
+        </p:spPr>
+      </p:pic>
+      <p:pic>
+        <p:nvPicPr>
+          <p:cNvPr id="8" name="그림 7">
+            <a:extLst>
+              <a:ext uri="{FF2B5EF4-FFF2-40B4-BE49-F238E27FC236}">
+                <a16:creationId xmlns:a16="http://schemas.microsoft.com/office/drawing/2014/main" id="{3C2C54D9-B0B1-7F51-402B-250BC720F792}"/>
+              </a:ext>
+            </a:extLst>
+          </p:cNvPr>
+          <p:cNvPicPr>
+            <a:picLocks noChangeAspect="1"/>
+          </p:cNvPicPr>
+          <p:nvPr/>
+        </p:nvPicPr>
+        <p:blipFill>
+          <a:blip r:embed="rId3"/>
+          <a:stretch>
+            <a:fillRect/>
+          </a:stretch>
+        </p:blipFill>
+        <p:spPr>
+          <a:xfrm>
+            <a:off x="1134960" y="4348936"/>
+            <a:ext cx="10602805" cy="342948"/>
+          </a:xfrm>
+          <a:prstGeom prst="rect">
+            <a:avLst/>
+          </a:prstGeom>
+        </p:spPr>
+      </p:pic>
+    </p:spTree>
+    <p:extLst>
+      <p:ext uri="{BB962C8B-B14F-4D97-AF65-F5344CB8AC3E}">
+        <p14:creationId xmlns:p14="http://schemas.microsoft.com/office/powerpoint/2010/main" val="3460126114"/>
+      </p:ext>
+    </p:extLst>
+  </p:cSld>
+  <p:clrMapOvr>
+    <a:masterClrMapping/>
+  </p:clrMapOvr>
+</p:sld>
+</file>
+
+<file path=ppt/slides/slide11.xml><?xml version="1.0" encoding="utf-8"?>
+<p:sld xmlns:a="http://schemas.openxmlformats.org/drawingml/2006/main" xmlns:r="http://schemas.openxmlformats.org/officeDocument/2006/relationships" xmlns:p="http://schemas.openxmlformats.org/presentationml/2006/main">
+  <p:cSld>
+    <p:spTree>
+      <p:nvGrpSpPr>
+        <p:cNvPr id="1" name=""/>
+        <p:cNvGrpSpPr/>
+        <p:nvPr/>
+      </p:nvGrpSpPr>
+      <p:grpSpPr>
+        <a:xfrm>
+          <a:off x="0" y="0"/>
+          <a:ext cx="0" cy="0"/>
+          <a:chOff x="0" y="0"/>
+          <a:chExt cx="0" cy="0"/>
+        </a:xfrm>
+      </p:grpSpPr>
+      <p:sp>
+        <p:nvSpPr>
+          <p:cNvPr id="2" name="제목 1">
+            <a:extLst>
+              <a:ext uri="{FF2B5EF4-FFF2-40B4-BE49-F238E27FC236}">
+                <a16:creationId xmlns:a16="http://schemas.microsoft.com/office/drawing/2014/main" id="{0319F963-F30F-ED82-2FC2-AE7805440452}"/>
+              </a:ext>
+            </a:extLst>
+          </p:cNvPr>
+          <p:cNvSpPr>
+            <a:spLocks noGrp="1"/>
+          </p:cNvSpPr>
+          <p:nvPr>
+            <p:ph type="title"/>
+          </p:nvPr>
+        </p:nvSpPr>
+        <p:spPr/>
+        <p:txBody>
+          <a:bodyPr/>
+          <a:lstStyle/>
+          <a:p>
+            <a:r>
+              <a:rPr lang="en-US" altLang="ko-KR"/>
+              <a:t>Git </a:t>
+            </a:r>
+            <a:r>
+              <a:rPr lang="ko-KR" altLang="en-US"/>
+              <a:t>으로 프로젝트 세팅</a:t>
+            </a:r>
+          </a:p>
+        </p:txBody>
+      </p:sp>
+      <p:pic>
+        <p:nvPicPr>
+          <p:cNvPr id="4" name="그림 3">
+            <a:extLst>
+              <a:ext uri="{FF2B5EF4-FFF2-40B4-BE49-F238E27FC236}">
+                <a16:creationId xmlns:a16="http://schemas.microsoft.com/office/drawing/2014/main" id="{8BB4EA47-C8A7-66E5-6F5D-21A9DB9EAD2A}"/>
+              </a:ext>
+            </a:extLst>
+          </p:cNvPr>
+          <p:cNvPicPr>
+            <a:picLocks noChangeAspect="1"/>
+          </p:cNvPicPr>
+          <p:nvPr/>
+        </p:nvPicPr>
+        <p:blipFill>
+          <a:blip r:embed="rId2"/>
+          <a:stretch>
+            <a:fillRect/>
+          </a:stretch>
+        </p:blipFill>
+        <p:spPr>
+          <a:xfrm>
+            <a:off x="374909" y="1909180"/>
+            <a:ext cx="5461991" cy="1776129"/>
+          </a:xfrm>
+          <a:prstGeom prst="rect">
+            <a:avLst/>
+          </a:prstGeom>
+        </p:spPr>
+      </p:pic>
+      <p:sp>
+        <p:nvSpPr>
+          <p:cNvPr id="5" name="TextBox 4">
+            <a:extLst>
+              <a:ext uri="{FF2B5EF4-FFF2-40B4-BE49-F238E27FC236}">
+                <a16:creationId xmlns:a16="http://schemas.microsoft.com/office/drawing/2014/main" id="{7401A0BD-5B3E-2B87-7A53-FA0464D93BB2}"/>
+              </a:ext>
+            </a:extLst>
+          </p:cNvPr>
+          <p:cNvSpPr txBox="1"/>
+          <p:nvPr/>
+        </p:nvSpPr>
+        <p:spPr>
+          <a:xfrm>
+            <a:off x="5966691" y="1911927"/>
+            <a:ext cx="6003636" cy="4216539"/>
+          </a:xfrm>
+          <a:prstGeom prst="rect">
+            <a:avLst/>
+          </a:prstGeom>
+          <a:noFill/>
+        </p:spPr>
+        <p:txBody>
+          <a:bodyPr wrap="square" rtlCol="0">
+            <a:spAutoFit/>
+          </a:bodyPr>
+          <a:lstStyle/>
+          <a:p>
+            <a:r>
+              <a:rPr lang="en-US" altLang="ko-KR" sz="1400"/>
+              <a:t>git </a:t>
+            </a:r>
+            <a:r>
+              <a:rPr lang="ko-KR" altLang="en-US" sz="1400"/>
+              <a:t>이랑 필요없는 파일들은 제거하고 </a:t>
+            </a:r>
+            <a:r>
+              <a:rPr lang="en-US" altLang="ko-KR" sz="1400"/>
+              <a:t>springboot</a:t>
+            </a:r>
+            <a:r>
+              <a:rPr lang="ko-KR" altLang="en-US" sz="1400"/>
+              <a:t> 폴더와 </a:t>
+            </a:r>
+            <a:r>
+              <a:rPr lang="en-US" altLang="ko-KR" sz="1400"/>
+              <a:t>docker </a:t>
+            </a:r>
+            <a:r>
+              <a:rPr lang="ko-KR" altLang="en-US" sz="1400"/>
+              <a:t>파일만 남긴다</a:t>
+            </a:r>
+            <a:r>
+              <a:rPr lang="en-US" altLang="ko-KR" sz="1400"/>
+              <a:t>.</a:t>
+            </a:r>
+          </a:p>
+          <a:p>
+            <a:endParaRPr lang="en-US" altLang="ko-KR" sz="1400"/>
+          </a:p>
+          <a:p>
+            <a:r>
+              <a:rPr lang="en-US" altLang="ko-KR" sz="1400"/>
+              <a:t>cd</a:t>
+            </a:r>
+            <a:r>
+              <a:rPr lang="ko-KR" altLang="en-US" sz="1400"/>
+              <a:t> </a:t>
+            </a:r>
+            <a:r>
+              <a:rPr lang="en-US" altLang="ko-KR" sz="1400"/>
+              <a:t>Redis_1</a:t>
+            </a:r>
+          </a:p>
+          <a:p>
+            <a:r>
+              <a:rPr lang="en-US" altLang="ko-KR" sz="1400"/>
+              <a:t>rm -rf *.pptx</a:t>
+            </a:r>
+          </a:p>
+          <a:p>
+            <a:r>
+              <a:rPr lang="en-US" altLang="ko-KR" sz="1400"/>
+              <a:t>rm -rf *.pdf</a:t>
+            </a:r>
+          </a:p>
+          <a:p>
+            <a:r>
+              <a:rPr lang="en-US" altLang="ko-KR" sz="1400"/>
+              <a:t>rm -rf redis-erminal-study</a:t>
+            </a:r>
+          </a:p>
+          <a:p>
+            <a:r>
+              <a:rPr lang="ko-KR" altLang="en-US" sz="1400"/>
+              <a:t>cd redisinspring/</a:t>
+            </a:r>
+            <a:endParaRPr lang="en-US" altLang="ko-KR" sz="1400"/>
+          </a:p>
+          <a:p>
+            <a:r>
+              <a:rPr lang="en-US" altLang="ko-KR" sz="1400"/>
+              <a:t>vi gradle.properties </a:t>
+            </a:r>
+            <a:endParaRPr lang="ko-KR" altLang="en-US" sz="1400"/>
+          </a:p>
+          <a:p>
+            <a:endParaRPr lang="en-US" altLang="ko-KR" sz="1400"/>
+          </a:p>
+          <a:p>
+            <a:r>
+              <a:rPr lang="en-US" altLang="ko-KR" sz="1400"/>
+              <a:t>org.gradle.java.home=/usr/lib/jvm/java-17-openjdk-amd64     ( </a:t>
+            </a:r>
+            <a:r>
+              <a:rPr lang="ko-KR" altLang="en-US" sz="1400"/>
+              <a:t>수정 </a:t>
+            </a:r>
+            <a:r>
+              <a:rPr lang="en-US" altLang="ko-KR" sz="1400"/>
+              <a:t>)</a:t>
+            </a:r>
+          </a:p>
+          <a:p>
+            <a:r>
+              <a:rPr lang="en-US" altLang="ko-KR" sz="1400"/>
+              <a:t>chmod 755 *</a:t>
+            </a:r>
+          </a:p>
+          <a:p>
+            <a:r>
+              <a:rPr lang="en-US" altLang="ko-KR" sz="1400"/>
+              <a:t>./gradlew clean build -x test</a:t>
+            </a:r>
+          </a:p>
+          <a:p>
+            <a:r>
+              <a:rPr lang="en-US" altLang="ko-KR" sz="1400"/>
+              <a:t>cd ..</a:t>
+            </a:r>
+          </a:p>
+          <a:p>
+            <a:r>
+              <a:rPr lang="de-DE" altLang="ko-KR" sz="1400"/>
+              <a:t>sudo usermod -aG docker ubuntu </a:t>
+            </a:r>
+            <a:r>
+              <a:rPr lang="de-DE" altLang="ko-KR" sz="1000"/>
+              <a:t>(</a:t>
+            </a:r>
+            <a:r>
+              <a:rPr lang="en-US" altLang="ko-KR" sz="1000"/>
+              <a:t>docker</a:t>
+            </a:r>
+            <a:r>
+              <a:rPr lang="ko-KR" altLang="en-US" sz="1000"/>
+              <a:t>그룹에 </a:t>
+            </a:r>
+            <a:r>
+              <a:rPr lang="en-US" altLang="ko-KR" sz="1000"/>
+              <a:t>ubuntu </a:t>
+            </a:r>
+            <a:r>
+              <a:rPr lang="ko-KR" altLang="en-US" sz="1000"/>
+              <a:t>유저 추가</a:t>
+            </a:r>
+            <a:r>
+              <a:rPr lang="en-US" altLang="ko-KR" sz="1000"/>
+              <a:t>)</a:t>
+            </a:r>
+          </a:p>
+          <a:p>
+            <a:endParaRPr lang="en-US" altLang="ko-KR" sz="1000"/>
+          </a:p>
+          <a:p>
+            <a:r>
+              <a:rPr lang="ko-KR" altLang="en-US" sz="1200"/>
+              <a:t>터미널 종료 </a:t>
+            </a:r>
+            <a:r>
+              <a:rPr lang="en-US" altLang="ko-KR" sz="1200">
+                <a:sym typeface="Wingdings" panose="05000000000000000000" pitchFamily="2" charset="2"/>
+              </a:rPr>
+              <a:t> </a:t>
+            </a:r>
+            <a:r>
+              <a:rPr lang="ko-KR" altLang="en-US" sz="1200">
+                <a:sym typeface="Wingdings" panose="05000000000000000000" pitchFamily="2" charset="2"/>
+              </a:rPr>
+              <a:t>재접속</a:t>
+            </a:r>
+            <a:endParaRPr lang="en-US" altLang="ko-KR" sz="1200">
+              <a:sym typeface="Wingdings" panose="05000000000000000000" pitchFamily="2" charset="2"/>
+            </a:endParaRPr>
+          </a:p>
+          <a:p>
+            <a:r>
+              <a:rPr lang="en-US" altLang="ko-KR" sz="1200">
+                <a:sym typeface="Wingdings" panose="05000000000000000000" pitchFamily="2" charset="2"/>
+              </a:rPr>
+              <a:t>cd</a:t>
+            </a:r>
+            <a:r>
+              <a:rPr lang="ko-KR" altLang="en-US" sz="1200">
+                <a:sym typeface="Wingdings" panose="05000000000000000000" pitchFamily="2" charset="2"/>
+              </a:rPr>
+              <a:t> </a:t>
+            </a:r>
+            <a:r>
+              <a:rPr lang="en-US" altLang="ko-KR" sz="1200">
+                <a:sym typeface="Wingdings" panose="05000000000000000000" pitchFamily="2" charset="2"/>
+              </a:rPr>
+              <a:t>Redis_1</a:t>
+            </a:r>
+            <a:endParaRPr lang="en-US" altLang="ko-KR" sz="1200"/>
+          </a:p>
+          <a:p>
+            <a:r>
+              <a:rPr lang="en-US" altLang="ko-KR" sz="1200"/>
+              <a:t>docker compose -f compose-prod.yml up --build -d  </a:t>
+            </a:r>
+          </a:p>
+          <a:p>
+            <a:r>
+              <a:rPr lang="en-US" altLang="ko-KR" sz="1200"/>
+              <a:t>docker ps</a:t>
+            </a:r>
+            <a:endParaRPr lang="ko-KR" altLang="en-US" sz="1200"/>
+          </a:p>
+        </p:txBody>
+      </p:sp>
+      <p:pic>
+        <p:nvPicPr>
+          <p:cNvPr id="7" name="그림 6">
+            <a:extLst>
+              <a:ext uri="{FF2B5EF4-FFF2-40B4-BE49-F238E27FC236}">
+                <a16:creationId xmlns:a16="http://schemas.microsoft.com/office/drawing/2014/main" id="{A76BEE15-BBE7-2E79-5524-A19D3C16C7C0}"/>
+              </a:ext>
+            </a:extLst>
+          </p:cNvPr>
+          <p:cNvPicPr>
+            <a:picLocks noChangeAspect="1"/>
+          </p:cNvPicPr>
+          <p:nvPr/>
+        </p:nvPicPr>
+        <p:blipFill>
+          <a:blip r:embed="rId3"/>
+          <a:stretch>
+            <a:fillRect/>
+          </a:stretch>
+        </p:blipFill>
+        <p:spPr>
+          <a:xfrm>
+            <a:off x="221673" y="3798166"/>
+            <a:ext cx="5745018" cy="222030"/>
+          </a:xfrm>
+          <a:prstGeom prst="rect">
+            <a:avLst/>
+          </a:prstGeom>
+        </p:spPr>
+      </p:pic>
+      <p:pic>
+        <p:nvPicPr>
+          <p:cNvPr id="11" name="그림 10">
+            <a:extLst>
+              <a:ext uri="{FF2B5EF4-FFF2-40B4-BE49-F238E27FC236}">
+                <a16:creationId xmlns:a16="http://schemas.microsoft.com/office/drawing/2014/main" id="{EC029A7D-3496-83FD-3858-E463592FB522}"/>
+              </a:ext>
+            </a:extLst>
+          </p:cNvPr>
+          <p:cNvPicPr>
+            <a:picLocks noChangeAspect="1"/>
+          </p:cNvPicPr>
+          <p:nvPr/>
+        </p:nvPicPr>
+        <p:blipFill>
+          <a:blip r:embed="rId4"/>
+          <a:stretch>
+            <a:fillRect/>
+          </a:stretch>
+        </p:blipFill>
+        <p:spPr>
+          <a:xfrm>
+            <a:off x="221673" y="6081002"/>
+            <a:ext cx="11600873" cy="626462"/>
+          </a:xfrm>
+          <a:prstGeom prst="rect">
+            <a:avLst/>
+          </a:prstGeom>
+        </p:spPr>
+      </p:pic>
+    </p:spTree>
+    <p:extLst>
+      <p:ext uri="{BB962C8B-B14F-4D97-AF65-F5344CB8AC3E}">
+        <p14:creationId xmlns:p14="http://schemas.microsoft.com/office/powerpoint/2010/main" val="1945876659"/>
+      </p:ext>
+    </p:extLst>
+  </p:cSld>
+  <p:clrMapOvr>
+    <a:masterClrMapping/>
+  </p:clrMapOvr>
+</p:sld>
+</file>
+
+<file path=ppt/slides/slide12.xml><?xml version="1.0" encoding="utf-8"?>
+<p:sld xmlns:a="http://schemas.openxmlformats.org/drawingml/2006/main" xmlns:r="http://schemas.openxmlformats.org/officeDocument/2006/relationships" xmlns:p="http://schemas.openxmlformats.org/presentationml/2006/main">
+  <p:cSld>
+    <p:spTree>
+      <p:nvGrpSpPr>
+        <p:cNvPr id="1" name=""/>
+        <p:cNvGrpSpPr/>
+        <p:nvPr/>
+      </p:nvGrpSpPr>
+      <p:grpSpPr>
+        <a:xfrm>
+          <a:off x="0" y="0"/>
+          <a:ext cx="0" cy="0"/>
+          <a:chOff x="0" y="0"/>
+          <a:chExt cx="0" cy="0"/>
+        </a:xfrm>
+      </p:grpSpPr>
+      <p:sp>
+        <p:nvSpPr>
+          <p:cNvPr id="2" name="제목 1">
+            <a:extLst>
+              <a:ext uri="{FF2B5EF4-FFF2-40B4-BE49-F238E27FC236}">
+                <a16:creationId xmlns:a16="http://schemas.microsoft.com/office/drawing/2014/main" id="{AB45EBAF-F010-27AE-E39D-18A0169E7A84}"/>
+              </a:ext>
+            </a:extLst>
+          </p:cNvPr>
+          <p:cNvSpPr>
+            <a:spLocks noGrp="1"/>
+          </p:cNvSpPr>
+          <p:nvPr>
+            <p:ph type="title"/>
+          </p:nvPr>
+        </p:nvSpPr>
+        <p:spPr/>
+        <p:txBody>
+          <a:bodyPr/>
+          <a:lstStyle/>
+          <a:p>
+            <a:r>
+              <a:rPr lang="en-US" altLang="ko-KR"/>
+              <a:t>AWS EC2 </a:t>
+            </a:r>
+            <a:r>
+              <a:rPr lang="ko-KR" altLang="en-US"/>
+              <a:t>로 요청 보내보기</a:t>
+            </a:r>
+          </a:p>
+        </p:txBody>
+      </p:sp>
+      <p:sp>
+        <p:nvSpPr>
+          <p:cNvPr id="4" name="TextBox 3">
+            <a:extLst>
+              <a:ext uri="{FF2B5EF4-FFF2-40B4-BE49-F238E27FC236}">
+                <a16:creationId xmlns:a16="http://schemas.microsoft.com/office/drawing/2014/main" id="{2CFF91C7-5CF1-C1C4-502A-6221C93C9617}"/>
+              </a:ext>
+            </a:extLst>
+          </p:cNvPr>
+          <p:cNvSpPr txBox="1"/>
+          <p:nvPr/>
+        </p:nvSpPr>
+        <p:spPr>
+          <a:xfrm>
+            <a:off x="1097280" y="1907370"/>
+            <a:ext cx="6096000" cy="369332"/>
+          </a:xfrm>
+          <a:prstGeom prst="rect">
+            <a:avLst/>
+          </a:prstGeom>
+          <a:noFill/>
+        </p:spPr>
+        <p:txBody>
+          <a:bodyPr wrap="square">
+            <a:spAutoFit/>
+          </a:bodyPr>
+          <a:lstStyle/>
+          <a:p>
+            <a:r>
+              <a:rPr lang="en-US" altLang="ko-KR"/>
+              <a:t>$ docker compose logs -f # </a:t>
+            </a:r>
+            <a:r>
+              <a:rPr lang="ko-KR" altLang="en-US"/>
+              <a:t>실시간 로그 확인하기 명령</a:t>
+            </a:r>
+          </a:p>
+        </p:txBody>
+      </p:sp>
+      <p:pic>
+        <p:nvPicPr>
+          <p:cNvPr id="6" name="그림 5">
+            <a:extLst>
+              <a:ext uri="{FF2B5EF4-FFF2-40B4-BE49-F238E27FC236}">
+                <a16:creationId xmlns:a16="http://schemas.microsoft.com/office/drawing/2014/main" id="{354B96D7-F99F-8F5B-6B8D-BBF69A78E80A}"/>
+              </a:ext>
+            </a:extLst>
+          </p:cNvPr>
+          <p:cNvPicPr>
+            <a:picLocks noChangeAspect="1"/>
+          </p:cNvPicPr>
+          <p:nvPr/>
+        </p:nvPicPr>
+        <p:blipFill>
+          <a:blip r:embed="rId2"/>
+          <a:stretch>
+            <a:fillRect/>
+          </a:stretch>
+        </p:blipFill>
+        <p:spPr>
+          <a:xfrm>
+            <a:off x="480290" y="2446712"/>
+            <a:ext cx="11517745" cy="1670322"/>
+          </a:xfrm>
+          <a:prstGeom prst="rect">
+            <a:avLst/>
+          </a:prstGeom>
+        </p:spPr>
+      </p:pic>
+    </p:spTree>
+    <p:extLst>
+      <p:ext uri="{BB962C8B-B14F-4D97-AF65-F5344CB8AC3E}">
+        <p14:creationId xmlns:p14="http://schemas.microsoft.com/office/powerpoint/2010/main" val="416571446"/>
+      </p:ext>
+    </p:extLst>
+  </p:cSld>
+  <p:clrMapOvr>
+    <a:masterClrMapping/>
+  </p:clrMapOvr>
+</p:sld>
+</file>
+
 <file path=ppt/slides/slide2.xml><?xml version="1.0" encoding="utf-8"?>
 <p:sld xmlns:a="http://schemas.openxmlformats.org/drawingml/2006/main" xmlns:r="http://schemas.openxmlformats.org/officeDocument/2006/relationships" xmlns:p="http://schemas.openxmlformats.org/presentationml/2006/main">
   <p:cSld>
@@ -8367,9 +9108,9 @@
         <p:grpSpPr>
           <a:xfrm>
             <a:off x="3048000" y="1941607"/>
-            <a:ext cx="4054764" cy="2979405"/>
+            <a:ext cx="4054764" cy="3323987"/>
             <a:chOff x="3048000" y="1941607"/>
-            <a:chExt cx="4054764" cy="2979405"/>
+            <a:chExt cx="4054764" cy="3323987"/>
           </a:xfrm>
         </p:grpSpPr>
         <p:sp>
@@ -8387,7 +9128,7 @@
           <p:spPr>
             <a:xfrm>
               <a:off x="3048000" y="1941607"/>
-              <a:ext cx="4054764" cy="2979405"/>
+              <a:ext cx="4054764" cy="3323987"/>
             </a:xfrm>
             <a:prstGeom prst="rect">
               <a:avLst/>
@@ -8504,6 +9245,41 @@
                 </a:rPr>
                 <a:t>: </a:t>
               </a:r>
+            </a:p>
+            <a:p>
+              <a:pPr>
+                <a:lnSpc>
+                  <a:spcPts val="1425"/>
+                </a:lnSpc>
+                <a:buNone/>
+              </a:pPr>
+              <a:r>
+                <a:rPr lang="en-US" altLang="ko-KR" sz="1200">
+                  <a:solidFill>
+                    <a:srgbClr val="BBBEBF"/>
+                  </a:solidFill>
+                  <a:latin typeface="Consolas" panose="020B0609020204030204" pitchFamily="49" charset="0"/>
+                </a:rPr>
+                <a:t>	</a:t>
+              </a:r>
+              <a:r>
+                <a:rPr lang="en-US" altLang="ko-KR" sz="1200">
+                  <a:solidFill>
+                    <a:srgbClr val="7EE787"/>
+                  </a:solidFill>
+                  <a:latin typeface="Consolas" panose="020B0609020204030204" pitchFamily="49" charset="0"/>
+                </a:rPr>
+                <a:t>context</a:t>
+              </a:r>
+              <a:r>
+                <a:rPr lang="en-US" altLang="ko-KR" sz="1200">
+                  <a:solidFill>
+                    <a:srgbClr val="BBBEBF"/>
+                  </a:solidFill>
+                  <a:latin typeface="Consolas" panose="020B0609020204030204" pitchFamily="49" charset="0"/>
+                </a:rPr>
+                <a:t>:</a:t>
+              </a:r>
               <a:r>
                 <a:rPr lang="en-US" altLang="ko-KR" sz="1200" b="0">
                   <a:solidFill>
@@ -8512,7 +9288,53 @@
                   <a:effectLst/>
                   <a:latin typeface="Consolas" panose="020B0609020204030204" pitchFamily="49" charset="0"/>
                 </a:rPr>
-                <a:t>./Dockerfile-prod</a:t>
+                <a:t>.</a:t>
+              </a:r>
+              <a:br>
+                <a:rPr lang="en-US" altLang="ko-KR" sz="1200" b="0">
+                  <a:solidFill>
+                    <a:srgbClr val="A5D6FF"/>
+                  </a:solidFill>
+                  <a:effectLst/>
+                  <a:latin typeface="Consolas" panose="020B0609020204030204" pitchFamily="49" charset="0"/>
+                </a:rPr>
+              </a:br>
+              <a:r>
+                <a:rPr lang="en-US" altLang="ko-KR" sz="1200" b="0">
+                  <a:solidFill>
+                    <a:srgbClr val="A5D6FF"/>
+                  </a:solidFill>
+                  <a:effectLst/>
+                  <a:latin typeface="Consolas" panose="020B0609020204030204" pitchFamily="49" charset="0"/>
+                </a:rPr>
+                <a:t>	</a:t>
+              </a:r>
+              <a:r>
+                <a:rPr lang="en-US" altLang="ko-KR" sz="1200">
+                  <a:solidFill>
+                    <a:srgbClr val="7EE787"/>
+                  </a:solidFill>
+                  <a:latin typeface="Consolas" panose="020B0609020204030204" pitchFamily="49" charset="0"/>
+                </a:rPr>
+                <a:t>dockerfile</a:t>
+              </a:r>
+              <a:r>
+                <a:rPr lang="en-US" altLang="ko-KR" sz="1200">
+                  <a:solidFill>
+                    <a:srgbClr val="BBBEBF"/>
+                  </a:solidFill>
+                  <a:latin typeface="Consolas" panose="020B0609020204030204" pitchFamily="49" charset="0"/>
+                </a:rPr>
+                <a:t>:</a:t>
+              </a:r>
+              <a:r>
+                <a:rPr lang="en-US" altLang="ko-KR" sz="1200">
+                  <a:solidFill>
+                    <a:srgbClr val="A5D6FF"/>
+                  </a:solidFill>
+                  <a:latin typeface="Consolas" panose="020B0609020204030204" pitchFamily="49" charset="0"/>
+                </a:rPr>
+                <a:t>Dockerfile-prod</a:t>
               </a:r>
               <a:endParaRPr lang="en-US" altLang="ko-KR" sz="1200" b="0">
                 <a:solidFill>
@@ -9155,7 +9977,7 @@
           <p:spPr>
             <a:xfrm>
               <a:off x="3364807" y="2332181"/>
-              <a:ext cx="2204719" cy="254001"/>
+              <a:ext cx="2500284" cy="586510"/>
             </a:xfrm>
             <a:prstGeom prst="rect">
               <a:avLst/>
@@ -9360,7 +10182,7 @@
           <p:cNvPr id="2" name="제목 1">
             <a:extLst>
               <a:ext uri="{FF2B5EF4-FFF2-40B4-BE49-F238E27FC236}">
-                <a16:creationId xmlns:a16="http://schemas.microsoft.com/office/drawing/2014/main" id="{C9BE4645-9C39-326A-3E12-DC60E02C1564}"/>
+                <a16:creationId xmlns:a16="http://schemas.microsoft.com/office/drawing/2014/main" id="{BAABD81C-25C2-3CBF-6C66-0336789FBAE8}"/>
               </a:ext>
             </a:extLst>
           </p:cNvPr>
@@ -9378,312 +10200,1216 @@
           <a:p>
             <a:r>
               <a:rPr lang="en-US" altLang="ko-KR"/>
-              <a:t>EC2 </a:t>
+              <a:t>application.yml </a:t>
             </a:r>
             <a:r>
               <a:rPr lang="ko-KR" altLang="en-US"/>
-              <a:t>시스템에 </a:t>
-            </a:r>
-            <a:r>
-              <a:rPr lang="en-US" altLang="ko-KR"/>
-              <a:t>Docker </a:t>
-            </a:r>
-            <a:r>
-              <a:rPr lang="ko-KR" altLang="en-US"/>
-              <a:t>설치하기</a:t>
+              <a:t>수정</a:t>
             </a:r>
           </a:p>
         </p:txBody>
       </p:sp>
-      <p:sp>
-        <p:nvSpPr>
-          <p:cNvPr id="6" name="TextBox 5">
+      <p:grpSp>
+        <p:nvGrpSpPr>
+          <p:cNvPr id="8" name="그룹 7">
             <a:extLst>
               <a:ext uri="{FF2B5EF4-FFF2-40B4-BE49-F238E27FC236}">
-                <a16:creationId xmlns:a16="http://schemas.microsoft.com/office/drawing/2014/main" id="{400FFA20-1DC5-B98B-9A07-69D5E7E0127C}"/>
+                <a16:creationId xmlns:a16="http://schemas.microsoft.com/office/drawing/2014/main" id="{F2D08DB1-57E1-4C62-B99B-3A8BA1286918}"/>
               </a:ext>
             </a:extLst>
           </p:cNvPr>
-          <p:cNvSpPr txBox="1"/>
+          <p:cNvGrpSpPr/>
           <p:nvPr/>
-        </p:nvSpPr>
-        <p:spPr>
+        </p:nvGrpSpPr>
+        <p:grpSpPr>
           <a:xfrm>
-            <a:off x="1163781" y="1816019"/>
-            <a:ext cx="10400145" cy="4062651"/>
+            <a:off x="1006763" y="1820924"/>
+            <a:ext cx="9439563" cy="4751685"/>
+            <a:chOff x="1006763" y="1820924"/>
+            <a:chExt cx="9439563" cy="4751685"/>
           </a:xfrm>
-          <a:prstGeom prst="rect">
-            <a:avLst/>
-          </a:prstGeom>
-          <a:noFill/>
-        </p:spPr>
-        <p:txBody>
-          <a:bodyPr wrap="square">
-            <a:spAutoFit/>
-          </a:bodyPr>
-          <a:lstStyle/>
-          <a:p>
-            <a:r>
-              <a:rPr lang="en-US" altLang="ko-KR" sz="1000" b="1">
+        </p:grpSpPr>
+        <p:grpSp>
+          <p:nvGrpSpPr>
+            <p:cNvPr id="6" name="그룹 5">
+              <a:extLst>
+                <a:ext uri="{FF2B5EF4-FFF2-40B4-BE49-F238E27FC236}">
+                  <a16:creationId xmlns:a16="http://schemas.microsoft.com/office/drawing/2014/main" id="{D9268B4C-ADC9-4583-9FB4-3FE1B890B4AB}"/>
+                </a:ext>
+              </a:extLst>
+            </p:cNvPr>
+            <p:cNvGrpSpPr/>
+            <p:nvPr/>
+          </p:nvGrpSpPr>
+          <p:grpSpPr>
+            <a:xfrm>
+              <a:off x="1006763" y="1820924"/>
+              <a:ext cx="9439563" cy="4751685"/>
+              <a:chOff x="1006763" y="1820924"/>
+              <a:chExt cx="9439563" cy="4751685"/>
+            </a:xfrm>
+          </p:grpSpPr>
+          <p:sp>
+            <p:nvSpPr>
+              <p:cNvPr id="4" name="TextBox 3">
+                <a:extLst>
+                  <a:ext uri="{FF2B5EF4-FFF2-40B4-BE49-F238E27FC236}">
+                    <a16:creationId xmlns:a16="http://schemas.microsoft.com/office/drawing/2014/main" id="{94EF6AF9-1AED-5DF6-1496-21C75F5FA4E9}"/>
+                  </a:ext>
+                </a:extLst>
+              </p:cNvPr>
+              <p:cNvSpPr txBox="1"/>
+              <p:nvPr/>
+            </p:nvSpPr>
+            <p:spPr>
+              <a:xfrm>
+                <a:off x="1006763" y="1820924"/>
+                <a:ext cx="9439563" cy="4751685"/>
+              </a:xfrm>
+              <a:prstGeom prst="rect">
+                <a:avLst/>
+              </a:prstGeom>
+              <a:solidFill>
+                <a:schemeClr val="tx1"/>
+              </a:solidFill>
+            </p:spPr>
+            <p:txBody>
+              <a:bodyPr wrap="square">
+                <a:spAutoFit/>
+              </a:bodyPr>
+              <a:lstStyle/>
+              <a:p>
+                <a:pPr>
+                  <a:lnSpc>
+                    <a:spcPts val="1425"/>
+                  </a:lnSpc>
+                  <a:buNone/>
+                </a:pPr>
+                <a:r>
+                  <a:rPr lang="en-US" altLang="ko-KR" sz="1100" b="0">
+                    <a:solidFill>
+                      <a:srgbClr val="79C0FF"/>
+                    </a:solidFill>
+                    <a:effectLst/>
+                    <a:latin typeface="Consolas" panose="020B0609020204030204" pitchFamily="49" charset="0"/>
+                  </a:rPr>
+                  <a:t>---</a:t>
+                </a:r>
+                <a:endParaRPr lang="en-US" altLang="ko-KR" sz="1100" b="0">
+                  <a:solidFill>
+                    <a:srgbClr val="BBBEBF"/>
+                  </a:solidFill>
+                  <a:effectLst/>
+                  <a:latin typeface="Consolas" panose="020B0609020204030204" pitchFamily="49" charset="0"/>
+                </a:endParaRPr>
+              </a:p>
+              <a:p>
+                <a:pPr>
+                  <a:lnSpc>
+                    <a:spcPts val="1425"/>
+                  </a:lnSpc>
+                  <a:buNone/>
+                </a:pPr>
+                <a:r>
+                  <a:rPr lang="en-US" altLang="ko-KR" sz="1100" b="0">
+                    <a:solidFill>
+                      <a:srgbClr val="7EE787"/>
+                    </a:solidFill>
+                    <a:effectLst/>
+                    <a:latin typeface="Consolas" panose="020B0609020204030204" pitchFamily="49" charset="0"/>
+                  </a:rPr>
+                  <a:t>spring</a:t>
+                </a:r>
+                <a:r>
+                  <a:rPr lang="en-US" altLang="ko-KR" sz="1100" b="0">
+                    <a:solidFill>
+                      <a:srgbClr val="BBBEBF"/>
+                    </a:solidFill>
+                    <a:effectLst/>
+                    <a:latin typeface="Consolas" panose="020B0609020204030204" pitchFamily="49" charset="0"/>
+                  </a:rPr>
+                  <a:t>:</a:t>
+                </a:r>
+              </a:p>
+              <a:p>
+                <a:pPr>
+                  <a:lnSpc>
+                    <a:spcPts val="1425"/>
+                  </a:lnSpc>
+                  <a:buNone/>
+                </a:pPr>
+                <a:r>
+                  <a:rPr lang="en-US" altLang="ko-KR" sz="1100" b="0">
+                    <a:solidFill>
+                      <a:srgbClr val="BBBEBF"/>
+                    </a:solidFill>
+                    <a:effectLst/>
+                    <a:latin typeface="Consolas" panose="020B0609020204030204" pitchFamily="49" charset="0"/>
+                  </a:rPr>
+                  <a:t>    </a:t>
+                </a:r>
+                <a:r>
+                  <a:rPr lang="en-US" altLang="ko-KR" sz="1100" b="0">
+                    <a:solidFill>
+                      <a:srgbClr val="7EE787"/>
+                    </a:solidFill>
+                    <a:effectLst/>
+                    <a:latin typeface="Consolas" panose="020B0609020204030204" pitchFamily="49" charset="0"/>
+                  </a:rPr>
+                  <a:t>config</a:t>
+                </a:r>
+                <a:r>
+                  <a:rPr lang="en-US" altLang="ko-KR" sz="1100" b="0">
+                    <a:solidFill>
+                      <a:srgbClr val="BBBEBF"/>
+                    </a:solidFill>
+                    <a:effectLst/>
+                    <a:latin typeface="Consolas" panose="020B0609020204030204" pitchFamily="49" charset="0"/>
+                  </a:rPr>
+                  <a:t>:</a:t>
+                </a:r>
+              </a:p>
+              <a:p>
+                <a:pPr>
+                  <a:lnSpc>
+                    <a:spcPts val="1425"/>
+                  </a:lnSpc>
+                  <a:buNone/>
+                </a:pPr>
+                <a:r>
+                  <a:rPr lang="en-US" altLang="ko-KR" sz="1100" b="0">
+                    <a:solidFill>
+                      <a:srgbClr val="BBBEBF"/>
+                    </a:solidFill>
+                    <a:effectLst/>
+                    <a:latin typeface="Consolas" panose="020B0609020204030204" pitchFamily="49" charset="0"/>
+                  </a:rPr>
+                  <a:t>        </a:t>
+                </a:r>
+                <a:r>
+                  <a:rPr lang="en-US" altLang="ko-KR" sz="1100" b="0">
+                    <a:solidFill>
+                      <a:srgbClr val="7EE787"/>
+                    </a:solidFill>
+                    <a:effectLst/>
+                    <a:latin typeface="Consolas" panose="020B0609020204030204" pitchFamily="49" charset="0"/>
+                  </a:rPr>
+                  <a:t>activate</a:t>
+                </a:r>
+                <a:r>
+                  <a:rPr lang="en-US" altLang="ko-KR" sz="1100" b="0">
+                    <a:solidFill>
+                      <a:srgbClr val="BBBEBF"/>
+                    </a:solidFill>
+                    <a:effectLst/>
+                    <a:latin typeface="Consolas" panose="020B0609020204030204" pitchFamily="49" charset="0"/>
+                  </a:rPr>
+                  <a:t>:</a:t>
+                </a:r>
+              </a:p>
+              <a:p>
+                <a:pPr>
+                  <a:lnSpc>
+                    <a:spcPts val="1425"/>
+                  </a:lnSpc>
+                  <a:buNone/>
+                </a:pPr>
+                <a:r>
+                  <a:rPr lang="en-US" altLang="ko-KR" sz="1100" b="0">
+                    <a:solidFill>
+                      <a:srgbClr val="BBBEBF"/>
+                    </a:solidFill>
+                    <a:effectLst/>
+                    <a:latin typeface="Consolas" panose="020B0609020204030204" pitchFamily="49" charset="0"/>
+                  </a:rPr>
+                  <a:t>            </a:t>
+                </a:r>
+                <a:r>
+                  <a:rPr lang="en-US" altLang="ko-KR" sz="1100" b="0">
+                    <a:solidFill>
+                      <a:srgbClr val="7EE787"/>
+                    </a:solidFill>
+                    <a:effectLst/>
+                    <a:latin typeface="Consolas" panose="020B0609020204030204" pitchFamily="49" charset="0"/>
+                  </a:rPr>
+                  <a:t>on-profile</a:t>
+                </a:r>
+                <a:r>
+                  <a:rPr lang="en-US" altLang="ko-KR" sz="1100" b="0">
+                    <a:solidFill>
+                      <a:srgbClr val="BBBEBF"/>
+                    </a:solidFill>
+                    <a:effectLst/>
+                    <a:latin typeface="Consolas" panose="020B0609020204030204" pitchFamily="49" charset="0"/>
+                  </a:rPr>
+                  <a:t>: </a:t>
+                </a:r>
+                <a:r>
+                  <a:rPr lang="en-US" altLang="ko-KR" sz="1100" b="0">
+                    <a:solidFill>
+                      <a:srgbClr val="A5D6FF"/>
+                    </a:solidFill>
+                    <a:effectLst/>
+                    <a:latin typeface="Consolas" panose="020B0609020204030204" pitchFamily="49" charset="0"/>
+                  </a:rPr>
+                  <a:t>prod</a:t>
+                </a:r>
+                <a:endParaRPr lang="en-US" altLang="ko-KR" sz="1100" b="0">
+                  <a:solidFill>
+                    <a:srgbClr val="BBBEBF"/>
+                  </a:solidFill>
+                  <a:effectLst/>
+                  <a:latin typeface="Consolas" panose="020B0609020204030204" pitchFamily="49" charset="0"/>
+                </a:endParaRPr>
+              </a:p>
+              <a:p>
+                <a:pPr>
+                  <a:lnSpc>
+                    <a:spcPts val="1425"/>
+                  </a:lnSpc>
+                  <a:buNone/>
+                </a:pPr>
+                <a:r>
+                  <a:rPr lang="en-US" altLang="ko-KR" sz="1100" b="0">
+                    <a:solidFill>
+                      <a:srgbClr val="BBBEBF"/>
+                    </a:solidFill>
+                    <a:effectLst/>
+                    <a:latin typeface="Consolas" panose="020B0609020204030204" pitchFamily="49" charset="0"/>
+                  </a:rPr>
+                  <a:t>            </a:t>
+                </a:r>
+              </a:p>
+              <a:p>
+                <a:pPr>
+                  <a:lnSpc>
+                    <a:spcPts val="1425"/>
+                  </a:lnSpc>
+                  <a:buNone/>
+                </a:pPr>
+                <a:r>
+                  <a:rPr lang="en-US" altLang="ko-KR" sz="1100" b="0">
+                    <a:solidFill>
+                      <a:srgbClr val="BBBEBF"/>
+                    </a:solidFill>
+                    <a:effectLst/>
+                    <a:latin typeface="Consolas" panose="020B0609020204030204" pitchFamily="49" charset="0"/>
+                  </a:rPr>
+                  <a:t>    </a:t>
+                </a:r>
+                <a:r>
+                  <a:rPr lang="en-US" altLang="ko-KR" sz="1100" b="0">
+                    <a:solidFill>
+                      <a:srgbClr val="7EE787"/>
+                    </a:solidFill>
+                    <a:effectLst/>
+                    <a:latin typeface="Consolas" panose="020B0609020204030204" pitchFamily="49" charset="0"/>
+                  </a:rPr>
+                  <a:t>datasource</a:t>
+                </a:r>
+                <a:r>
+                  <a:rPr lang="en-US" altLang="ko-KR" sz="1100" b="0">
+                    <a:solidFill>
+                      <a:srgbClr val="BBBEBF"/>
+                    </a:solidFill>
+                    <a:effectLst/>
+                    <a:latin typeface="Consolas" panose="020B0609020204030204" pitchFamily="49" charset="0"/>
+                  </a:rPr>
+                  <a:t>:</a:t>
+                </a:r>
+              </a:p>
+              <a:p>
+                <a:pPr>
+                  <a:lnSpc>
+                    <a:spcPts val="1425"/>
+                  </a:lnSpc>
+                  <a:buNone/>
+                </a:pPr>
+                <a:r>
+                  <a:rPr lang="en-US" altLang="ko-KR" sz="1100" b="0">
+                    <a:solidFill>
+                      <a:srgbClr val="BBBEBF"/>
+                    </a:solidFill>
+                    <a:effectLst/>
+                    <a:latin typeface="Consolas" panose="020B0609020204030204" pitchFamily="49" charset="0"/>
+                  </a:rPr>
+                  <a:t>        </a:t>
+                </a:r>
+                <a:r>
+                  <a:rPr lang="en-US" altLang="ko-KR" sz="1100" b="0">
+                    <a:solidFill>
+                      <a:srgbClr val="7EE787"/>
+                    </a:solidFill>
+                    <a:effectLst/>
+                    <a:latin typeface="Consolas" panose="020B0609020204030204" pitchFamily="49" charset="0"/>
+                  </a:rPr>
+                  <a:t>url</a:t>
+                </a:r>
+                <a:r>
+                  <a:rPr lang="en-US" altLang="ko-KR" sz="1100" b="0">
+                    <a:solidFill>
+                      <a:srgbClr val="BBBEBF"/>
+                    </a:solidFill>
+                    <a:effectLst/>
+                    <a:latin typeface="Consolas" panose="020B0609020204030204" pitchFamily="49" charset="0"/>
+                  </a:rPr>
+                  <a:t>: </a:t>
+                </a:r>
+                <a:r>
+                  <a:rPr lang="en-US" altLang="ko-KR" sz="1100" b="0">
+                    <a:solidFill>
+                      <a:srgbClr val="A5D6FF"/>
+                    </a:solidFill>
+                    <a:effectLst/>
+                    <a:latin typeface="Consolas" panose="020B0609020204030204" pitchFamily="49" charset="0"/>
+                  </a:rPr>
+                  <a:t>jdbc:mysql://redis-learning-db.cx8u4i82c37m.ap-northeast-2.rds.amazonaws.com:3306/redis_learning_db</a:t>
+                </a:r>
+                <a:endParaRPr lang="en-US" altLang="ko-KR" sz="1100" b="0">
+                  <a:solidFill>
+                    <a:srgbClr val="BBBEBF"/>
+                  </a:solidFill>
+                  <a:effectLst/>
+                  <a:latin typeface="Consolas" panose="020B0609020204030204" pitchFamily="49" charset="0"/>
+                </a:endParaRPr>
+              </a:p>
+              <a:p>
+                <a:pPr>
+                  <a:lnSpc>
+                    <a:spcPts val="1425"/>
+                  </a:lnSpc>
+                  <a:buNone/>
+                </a:pPr>
+                <a:r>
+                  <a:rPr lang="en-US" altLang="ko-KR" sz="1100" b="0">
+                    <a:solidFill>
+                      <a:srgbClr val="BBBEBF"/>
+                    </a:solidFill>
+                    <a:effectLst/>
+                    <a:latin typeface="Consolas" panose="020B0609020204030204" pitchFamily="49" charset="0"/>
+                  </a:rPr>
+                  <a:t>        </a:t>
+                </a:r>
+                <a:r>
+                  <a:rPr lang="en-US" altLang="ko-KR" sz="1100" b="0">
+                    <a:solidFill>
+                      <a:srgbClr val="7EE787"/>
+                    </a:solidFill>
+                    <a:effectLst/>
+                    <a:latin typeface="Consolas" panose="020B0609020204030204" pitchFamily="49" charset="0"/>
+                  </a:rPr>
+                  <a:t>username</a:t>
+                </a:r>
+                <a:r>
+                  <a:rPr lang="en-US" altLang="ko-KR" sz="1100" b="0">
+                    <a:solidFill>
+                      <a:srgbClr val="BBBEBF"/>
+                    </a:solidFill>
+                    <a:effectLst/>
+                    <a:latin typeface="Consolas" panose="020B0609020204030204" pitchFamily="49" charset="0"/>
+                  </a:rPr>
+                  <a:t>: </a:t>
+                </a:r>
+                <a:r>
+                  <a:rPr lang="en-US" altLang="ko-KR" sz="1100" b="0">
+                    <a:solidFill>
+                      <a:srgbClr val="A5D6FF"/>
+                    </a:solidFill>
+                    <a:effectLst/>
+                    <a:latin typeface="Consolas" panose="020B0609020204030204" pitchFamily="49" charset="0"/>
+                  </a:rPr>
+                  <a:t>admin</a:t>
+                </a:r>
+                <a:endParaRPr lang="en-US" altLang="ko-KR" sz="1100" b="0">
+                  <a:solidFill>
+                    <a:srgbClr val="BBBEBF"/>
+                  </a:solidFill>
+                  <a:effectLst/>
+                  <a:latin typeface="Consolas" panose="020B0609020204030204" pitchFamily="49" charset="0"/>
+                </a:endParaRPr>
+              </a:p>
+              <a:p>
+                <a:pPr>
+                  <a:lnSpc>
+                    <a:spcPts val="1425"/>
+                  </a:lnSpc>
+                  <a:buNone/>
+                </a:pPr>
+                <a:r>
+                  <a:rPr lang="en-US" altLang="ko-KR" sz="1100" b="0">
+                    <a:solidFill>
+                      <a:srgbClr val="BBBEBF"/>
+                    </a:solidFill>
+                    <a:effectLst/>
+                    <a:latin typeface="Consolas" panose="020B0609020204030204" pitchFamily="49" charset="0"/>
+                  </a:rPr>
+                  <a:t>        </a:t>
+                </a:r>
+                <a:r>
+                  <a:rPr lang="en-US" altLang="ko-KR" sz="1100" b="0">
+                    <a:solidFill>
+                      <a:srgbClr val="7EE787"/>
+                    </a:solidFill>
+                    <a:effectLst/>
+                    <a:latin typeface="Consolas" panose="020B0609020204030204" pitchFamily="49" charset="0"/>
+                  </a:rPr>
+                  <a:t>password</a:t>
+                </a:r>
+                <a:r>
+                  <a:rPr lang="en-US" altLang="ko-KR" sz="1100" b="0">
+                    <a:solidFill>
+                      <a:srgbClr val="BBBEBF"/>
+                    </a:solidFill>
+                    <a:effectLst/>
+                    <a:latin typeface="Consolas" panose="020B0609020204030204" pitchFamily="49" charset="0"/>
+                  </a:rPr>
+                  <a:t>: </a:t>
+                </a:r>
+                <a:r>
+                  <a:rPr lang="en-US" altLang="ko-KR" sz="1100" b="0">
+                    <a:solidFill>
+                      <a:srgbClr val="A5D6FF"/>
+                    </a:solidFill>
+                    <a:effectLst/>
+                    <a:latin typeface="Consolas" panose="020B0609020204030204" pitchFamily="49" charset="0"/>
+                  </a:rPr>
+                  <a:t>password</a:t>
+                </a:r>
+                <a:endParaRPr lang="en-US" altLang="ko-KR" sz="1100" b="0">
+                  <a:solidFill>
+                    <a:srgbClr val="BBBEBF"/>
+                  </a:solidFill>
+                  <a:effectLst/>
+                  <a:latin typeface="Consolas" panose="020B0609020204030204" pitchFamily="49" charset="0"/>
+                </a:endParaRPr>
+              </a:p>
+              <a:p>
+                <a:pPr>
+                  <a:lnSpc>
+                    <a:spcPts val="1425"/>
+                  </a:lnSpc>
+                  <a:buNone/>
+                </a:pPr>
+                <a:r>
+                  <a:rPr lang="en-US" altLang="ko-KR" sz="1100" b="0">
+                    <a:solidFill>
+                      <a:srgbClr val="BBBEBF"/>
+                    </a:solidFill>
+                    <a:effectLst/>
+                    <a:latin typeface="Consolas" panose="020B0609020204030204" pitchFamily="49" charset="0"/>
+                  </a:rPr>
+                  <a:t>        </a:t>
+                </a:r>
+                <a:r>
+                  <a:rPr lang="en-US" altLang="ko-KR" sz="1100" b="0">
+                    <a:solidFill>
+                      <a:srgbClr val="7EE787"/>
+                    </a:solidFill>
+                    <a:effectLst/>
+                    <a:latin typeface="Consolas" panose="020B0609020204030204" pitchFamily="49" charset="0"/>
+                  </a:rPr>
+                  <a:t>driver-class-name</a:t>
+                </a:r>
+                <a:r>
+                  <a:rPr lang="en-US" altLang="ko-KR" sz="1100" b="0">
+                    <a:solidFill>
+                      <a:srgbClr val="BBBEBF"/>
+                    </a:solidFill>
+                    <a:effectLst/>
+                    <a:latin typeface="Consolas" panose="020B0609020204030204" pitchFamily="49" charset="0"/>
+                  </a:rPr>
+                  <a:t>: </a:t>
+                </a:r>
+                <a:r>
+                  <a:rPr lang="en-US" altLang="ko-KR" sz="1100" b="0">
+                    <a:solidFill>
+                      <a:srgbClr val="A5D6FF"/>
+                    </a:solidFill>
+                    <a:effectLst/>
+                    <a:latin typeface="Consolas" panose="020B0609020204030204" pitchFamily="49" charset="0"/>
+                  </a:rPr>
+                  <a:t>com.mysql.cj.jdbc.Driver</a:t>
+                </a:r>
+                <a:endParaRPr lang="en-US" altLang="ko-KR" sz="1100" b="0">
+                  <a:solidFill>
+                    <a:srgbClr val="BBBEBF"/>
+                  </a:solidFill>
+                  <a:effectLst/>
+                  <a:latin typeface="Consolas" panose="020B0609020204030204" pitchFamily="49" charset="0"/>
+                </a:endParaRPr>
+              </a:p>
+              <a:p>
+                <a:pPr>
+                  <a:lnSpc>
+                    <a:spcPts val="1425"/>
+                  </a:lnSpc>
+                  <a:buNone/>
+                </a:pPr>
+                <a:endParaRPr lang="en-US" altLang="ko-KR" sz="1100" b="0">
+                  <a:solidFill>
+                    <a:srgbClr val="BBBEBF"/>
+                  </a:solidFill>
+                  <a:effectLst/>
+                  <a:latin typeface="Consolas" panose="020B0609020204030204" pitchFamily="49" charset="0"/>
+                </a:endParaRPr>
+              </a:p>
+              <a:p>
+                <a:pPr>
+                  <a:lnSpc>
+                    <a:spcPts val="1425"/>
+                  </a:lnSpc>
+                  <a:buNone/>
+                </a:pPr>
+                <a:r>
+                  <a:rPr lang="en-US" altLang="ko-KR" sz="1100" b="0">
+                    <a:solidFill>
+                      <a:srgbClr val="BBBEBF"/>
+                    </a:solidFill>
+                    <a:effectLst/>
+                    <a:latin typeface="Consolas" panose="020B0609020204030204" pitchFamily="49" charset="0"/>
+                  </a:rPr>
+                  <a:t>    </a:t>
+                </a:r>
+                <a:r>
+                  <a:rPr lang="en-US" altLang="ko-KR" sz="1100" b="0">
+                    <a:solidFill>
+                      <a:srgbClr val="7EE787"/>
+                    </a:solidFill>
+                    <a:effectLst/>
+                    <a:latin typeface="Consolas" panose="020B0609020204030204" pitchFamily="49" charset="0"/>
+                  </a:rPr>
+                  <a:t>jpa</a:t>
+                </a:r>
+                <a:r>
+                  <a:rPr lang="en-US" altLang="ko-KR" sz="1100" b="0">
+                    <a:solidFill>
+                      <a:srgbClr val="BBBEBF"/>
+                    </a:solidFill>
+                    <a:effectLst/>
+                    <a:latin typeface="Consolas" panose="020B0609020204030204" pitchFamily="49" charset="0"/>
+                  </a:rPr>
+                  <a:t>:</a:t>
+                </a:r>
+              </a:p>
+              <a:p>
+                <a:pPr>
+                  <a:lnSpc>
+                    <a:spcPts val="1425"/>
+                  </a:lnSpc>
+                  <a:buNone/>
+                </a:pPr>
+                <a:r>
+                  <a:rPr lang="en-US" altLang="ko-KR" sz="1100" b="0">
+                    <a:solidFill>
+                      <a:srgbClr val="BBBEBF"/>
+                    </a:solidFill>
+                    <a:effectLst/>
+                    <a:latin typeface="Consolas" panose="020B0609020204030204" pitchFamily="49" charset="0"/>
+                  </a:rPr>
+                  <a:t>        </a:t>
+                </a:r>
+                <a:r>
+                  <a:rPr lang="en-US" altLang="ko-KR" sz="1100" b="0">
+                    <a:solidFill>
+                      <a:srgbClr val="7EE787"/>
+                    </a:solidFill>
+                    <a:effectLst/>
+                    <a:latin typeface="Consolas" panose="020B0609020204030204" pitchFamily="49" charset="0"/>
+                  </a:rPr>
+                  <a:t>hibernate</a:t>
+                </a:r>
+                <a:r>
+                  <a:rPr lang="en-US" altLang="ko-KR" sz="1100" b="0">
+                    <a:solidFill>
+                      <a:srgbClr val="BBBEBF"/>
+                    </a:solidFill>
+                    <a:effectLst/>
+                    <a:latin typeface="Consolas" panose="020B0609020204030204" pitchFamily="49" charset="0"/>
+                  </a:rPr>
+                  <a:t>:</a:t>
+                </a:r>
+              </a:p>
+              <a:p>
+                <a:pPr>
+                  <a:lnSpc>
+                    <a:spcPts val="1425"/>
+                  </a:lnSpc>
+                  <a:buNone/>
+                </a:pPr>
+                <a:r>
+                  <a:rPr lang="en-US" altLang="ko-KR" sz="1100" b="0">
+                    <a:solidFill>
+                      <a:srgbClr val="BBBEBF"/>
+                    </a:solidFill>
+                    <a:effectLst/>
+                    <a:latin typeface="Consolas" panose="020B0609020204030204" pitchFamily="49" charset="0"/>
+                  </a:rPr>
+                  <a:t>            </a:t>
+                </a:r>
+                <a:r>
+                  <a:rPr lang="en-US" altLang="ko-KR" sz="1100" b="0">
+                    <a:solidFill>
+                      <a:srgbClr val="7EE787"/>
+                    </a:solidFill>
+                    <a:effectLst/>
+                    <a:latin typeface="Consolas" panose="020B0609020204030204" pitchFamily="49" charset="0"/>
+                  </a:rPr>
+                  <a:t>ddl-auto</a:t>
+                </a:r>
+                <a:r>
+                  <a:rPr lang="en-US" altLang="ko-KR" sz="1100" b="0">
+                    <a:solidFill>
+                      <a:srgbClr val="BBBEBF"/>
+                    </a:solidFill>
+                    <a:effectLst/>
+                    <a:latin typeface="Consolas" panose="020B0609020204030204" pitchFamily="49" charset="0"/>
+                  </a:rPr>
+                  <a:t>: </a:t>
+                </a:r>
+                <a:r>
+                  <a:rPr lang="en-US" altLang="ko-KR" sz="1100" b="0">
+                    <a:solidFill>
+                      <a:srgbClr val="A5D6FF"/>
+                    </a:solidFill>
+                    <a:effectLst/>
+                    <a:latin typeface="Consolas" panose="020B0609020204030204" pitchFamily="49" charset="0"/>
+                  </a:rPr>
+                  <a:t>update</a:t>
+                </a:r>
+                <a:endParaRPr lang="en-US" altLang="ko-KR" sz="1100" b="0">
+                  <a:solidFill>
+                    <a:srgbClr val="BBBEBF"/>
+                  </a:solidFill>
+                  <a:effectLst/>
+                  <a:latin typeface="Consolas" panose="020B0609020204030204" pitchFamily="49" charset="0"/>
+                </a:endParaRPr>
+              </a:p>
+              <a:p>
+                <a:pPr>
+                  <a:lnSpc>
+                    <a:spcPts val="1425"/>
+                  </a:lnSpc>
+                  <a:buNone/>
+                </a:pPr>
+                <a:r>
+                  <a:rPr lang="en-US" altLang="ko-KR" sz="1100" b="0">
+                    <a:solidFill>
+                      <a:srgbClr val="BBBEBF"/>
+                    </a:solidFill>
+                    <a:effectLst/>
+                    <a:latin typeface="Consolas" panose="020B0609020204030204" pitchFamily="49" charset="0"/>
+                  </a:rPr>
+                  <a:t>        </a:t>
+                </a:r>
+                <a:r>
+                  <a:rPr lang="en-US" altLang="ko-KR" sz="1100" b="0">
+                    <a:solidFill>
+                      <a:srgbClr val="7EE787"/>
+                    </a:solidFill>
+                    <a:effectLst/>
+                    <a:latin typeface="Consolas" panose="020B0609020204030204" pitchFamily="49" charset="0"/>
+                  </a:rPr>
+                  <a:t>show-sql</a:t>
+                </a:r>
+                <a:r>
+                  <a:rPr lang="en-US" altLang="ko-KR" sz="1100" b="0">
+                    <a:solidFill>
+                      <a:srgbClr val="BBBEBF"/>
+                    </a:solidFill>
+                    <a:effectLst/>
+                    <a:latin typeface="Consolas" panose="020B0609020204030204" pitchFamily="49" charset="0"/>
+                  </a:rPr>
+                  <a:t>: </a:t>
+                </a:r>
+                <a:r>
+                  <a:rPr lang="en-US" altLang="ko-KR" sz="1100" b="0">
+                    <a:solidFill>
+                      <a:srgbClr val="569CD6"/>
+                    </a:solidFill>
+                    <a:effectLst/>
+                    <a:latin typeface="Consolas" panose="020B0609020204030204" pitchFamily="49" charset="0"/>
+                  </a:rPr>
+                  <a:t>true</a:t>
+                </a:r>
+                <a:endParaRPr lang="en-US" altLang="ko-KR" sz="1100" b="0">
+                  <a:solidFill>
+                    <a:srgbClr val="BBBEBF"/>
+                  </a:solidFill>
+                  <a:effectLst/>
+                  <a:latin typeface="Consolas" panose="020B0609020204030204" pitchFamily="49" charset="0"/>
+                </a:endParaRPr>
+              </a:p>
+              <a:p>
+                <a:pPr>
+                  <a:lnSpc>
+                    <a:spcPts val="1425"/>
+                  </a:lnSpc>
+                  <a:buNone/>
+                </a:pPr>
+                <a:r>
+                  <a:rPr lang="en-US" altLang="ko-KR" sz="1100" b="0">
+                    <a:solidFill>
+                      <a:srgbClr val="BBBEBF"/>
+                    </a:solidFill>
+                    <a:effectLst/>
+                    <a:latin typeface="Consolas" panose="020B0609020204030204" pitchFamily="49" charset="0"/>
+                  </a:rPr>
+                  <a:t>        </a:t>
+                </a:r>
+              </a:p>
+              <a:p>
+                <a:pPr>
+                  <a:lnSpc>
+                    <a:spcPts val="1425"/>
+                  </a:lnSpc>
+                  <a:buNone/>
+                </a:pPr>
+                <a:r>
+                  <a:rPr lang="en-US" altLang="ko-KR" sz="1100" b="0">
+                    <a:solidFill>
+                      <a:srgbClr val="BBBEBF"/>
+                    </a:solidFill>
+                    <a:effectLst/>
+                    <a:latin typeface="Consolas" panose="020B0609020204030204" pitchFamily="49" charset="0"/>
+                  </a:rPr>
+                  <a:t>    </a:t>
+                </a:r>
+                <a:r>
+                  <a:rPr lang="en-US" altLang="ko-KR" sz="1100" b="0">
+                    <a:solidFill>
+                      <a:srgbClr val="7EE787"/>
+                    </a:solidFill>
+                    <a:effectLst/>
+                    <a:latin typeface="Consolas" panose="020B0609020204030204" pitchFamily="49" charset="0"/>
+                  </a:rPr>
+                  <a:t>data</a:t>
+                </a:r>
+                <a:r>
+                  <a:rPr lang="en-US" altLang="ko-KR" sz="1100" b="0">
+                    <a:solidFill>
+                      <a:srgbClr val="BBBEBF"/>
+                    </a:solidFill>
+                    <a:effectLst/>
+                    <a:latin typeface="Consolas" panose="020B0609020204030204" pitchFamily="49" charset="0"/>
+                  </a:rPr>
+                  <a:t>:</a:t>
+                </a:r>
+              </a:p>
+              <a:p>
+                <a:pPr>
+                  <a:lnSpc>
+                    <a:spcPts val="1425"/>
+                  </a:lnSpc>
+                  <a:buNone/>
+                </a:pPr>
+                <a:r>
+                  <a:rPr lang="en-US" altLang="ko-KR" sz="1100" b="0">
+                    <a:solidFill>
+                      <a:srgbClr val="BBBEBF"/>
+                    </a:solidFill>
+                    <a:effectLst/>
+                    <a:latin typeface="Consolas" panose="020B0609020204030204" pitchFamily="49" charset="0"/>
+                  </a:rPr>
+                  <a:t>        </a:t>
+                </a:r>
+                <a:r>
+                  <a:rPr lang="en-US" altLang="ko-KR" sz="1100" b="0">
+                    <a:solidFill>
+                      <a:srgbClr val="7EE787"/>
+                    </a:solidFill>
+                    <a:effectLst/>
+                    <a:latin typeface="Consolas" panose="020B0609020204030204" pitchFamily="49" charset="0"/>
+                  </a:rPr>
+                  <a:t>redis</a:t>
+                </a:r>
+                <a:r>
+                  <a:rPr lang="en-US" altLang="ko-KR" sz="1100" b="0">
+                    <a:solidFill>
+                      <a:srgbClr val="BBBEBF"/>
+                    </a:solidFill>
+                    <a:effectLst/>
+                    <a:latin typeface="Consolas" panose="020B0609020204030204" pitchFamily="49" charset="0"/>
+                  </a:rPr>
+                  <a:t>:</a:t>
+                </a:r>
+              </a:p>
+              <a:p>
+                <a:pPr>
+                  <a:lnSpc>
+                    <a:spcPts val="1425"/>
+                  </a:lnSpc>
+                  <a:buNone/>
+                </a:pPr>
+                <a:r>
+                  <a:rPr lang="en-US" altLang="ko-KR" sz="1100" b="0">
+                    <a:solidFill>
+                      <a:srgbClr val="BBBEBF"/>
+                    </a:solidFill>
+                    <a:effectLst/>
+                    <a:latin typeface="Consolas" panose="020B0609020204030204" pitchFamily="49" charset="0"/>
+                  </a:rPr>
+                  <a:t>            </a:t>
+                </a:r>
+                <a:r>
+                  <a:rPr lang="en-US" altLang="ko-KR" sz="1100" b="0">
+                    <a:solidFill>
+                      <a:srgbClr val="7EE787"/>
+                    </a:solidFill>
+                    <a:effectLst/>
+                    <a:latin typeface="Consolas" panose="020B0609020204030204" pitchFamily="49" charset="0"/>
+                  </a:rPr>
+                  <a:t>host</a:t>
+                </a:r>
+                <a:r>
+                  <a:rPr lang="en-US" altLang="ko-KR" sz="1100" b="0">
+                    <a:solidFill>
+                      <a:srgbClr val="BBBEBF"/>
+                    </a:solidFill>
+                    <a:effectLst/>
+                    <a:latin typeface="Consolas" panose="020B0609020204030204" pitchFamily="49" charset="0"/>
+                  </a:rPr>
+                  <a:t>: </a:t>
+                </a:r>
+                <a:r>
+                  <a:rPr lang="en-US" altLang="ko-KR" sz="1100" b="0">
+                    <a:solidFill>
+                      <a:srgbClr val="A5D6FF"/>
+                    </a:solidFill>
+                    <a:effectLst/>
+                    <a:latin typeface="Consolas" panose="020B0609020204030204" pitchFamily="49" charset="0"/>
+                  </a:rPr>
+                  <a:t>cache-server</a:t>
+                </a:r>
+                <a:endParaRPr lang="en-US" altLang="ko-KR" sz="1100" b="0">
+                  <a:solidFill>
+                    <a:srgbClr val="BBBEBF"/>
+                  </a:solidFill>
+                  <a:effectLst/>
+                  <a:latin typeface="Consolas" panose="020B0609020204030204" pitchFamily="49" charset="0"/>
+                </a:endParaRPr>
+              </a:p>
+              <a:p>
+                <a:pPr>
+                  <a:lnSpc>
+                    <a:spcPts val="1425"/>
+                  </a:lnSpc>
+                  <a:buNone/>
+                </a:pPr>
+                <a:r>
+                  <a:rPr lang="en-US" altLang="ko-KR" sz="1100" b="0">
+                    <a:solidFill>
+                      <a:srgbClr val="BBBEBF"/>
+                    </a:solidFill>
+                    <a:effectLst/>
+                    <a:latin typeface="Consolas" panose="020B0609020204030204" pitchFamily="49" charset="0"/>
+                  </a:rPr>
+                  <a:t>            </a:t>
+                </a:r>
+                <a:r>
+                  <a:rPr lang="en-US" altLang="ko-KR" sz="1100" b="0">
+                    <a:solidFill>
+                      <a:srgbClr val="7EE787"/>
+                    </a:solidFill>
+                    <a:effectLst/>
+                    <a:latin typeface="Consolas" panose="020B0609020204030204" pitchFamily="49" charset="0"/>
+                  </a:rPr>
+                  <a:t>port</a:t>
+                </a:r>
+                <a:r>
+                  <a:rPr lang="en-US" altLang="ko-KR" sz="1100" b="0">
+                    <a:solidFill>
+                      <a:srgbClr val="BBBEBF"/>
+                    </a:solidFill>
+                    <a:effectLst/>
+                    <a:latin typeface="Consolas" panose="020B0609020204030204" pitchFamily="49" charset="0"/>
+                  </a:rPr>
+                  <a:t>: </a:t>
+                </a:r>
+                <a:r>
+                  <a:rPr lang="en-US" altLang="ko-KR" sz="1100" b="0">
+                    <a:solidFill>
+                      <a:srgbClr val="B5CEA8"/>
+                    </a:solidFill>
+                    <a:effectLst/>
+                    <a:latin typeface="Consolas" panose="020B0609020204030204" pitchFamily="49" charset="0"/>
+                  </a:rPr>
+                  <a:t>6379</a:t>
+                </a:r>
+                <a:br>
+                  <a:rPr lang="en-US" altLang="ko-KR" sz="1100" b="0">
+                    <a:solidFill>
+                      <a:srgbClr val="BBBEBF"/>
+                    </a:solidFill>
+                    <a:effectLst/>
+                    <a:latin typeface="Consolas" panose="020B0609020204030204" pitchFamily="49" charset="0"/>
+                  </a:rPr>
+                </a:br>
+                <a:endParaRPr lang="en-US" altLang="ko-KR" sz="1100" b="0">
+                  <a:solidFill>
+                    <a:srgbClr val="BBBEBF"/>
+                  </a:solidFill>
+                  <a:effectLst/>
+                  <a:latin typeface="Consolas" panose="020B0609020204030204" pitchFamily="49" charset="0"/>
+                </a:endParaRPr>
+              </a:p>
+              <a:p>
+                <a:pPr>
+                  <a:lnSpc>
+                    <a:spcPts val="1425"/>
+                  </a:lnSpc>
+                  <a:buNone/>
+                </a:pPr>
+                <a:r>
+                  <a:rPr lang="en-US" altLang="ko-KR" sz="1100" b="0">
+                    <a:solidFill>
+                      <a:srgbClr val="7EE787"/>
+                    </a:solidFill>
+                    <a:effectLst/>
+                    <a:latin typeface="Consolas" panose="020B0609020204030204" pitchFamily="49" charset="0"/>
+                  </a:rPr>
+                  <a:t>logging</a:t>
+                </a:r>
+                <a:r>
+                  <a:rPr lang="en-US" altLang="ko-KR" sz="1100" b="0">
+                    <a:solidFill>
+                      <a:srgbClr val="BBBEBF"/>
+                    </a:solidFill>
+                    <a:effectLst/>
+                    <a:latin typeface="Consolas" panose="020B0609020204030204" pitchFamily="49" charset="0"/>
+                  </a:rPr>
+                  <a:t>:</a:t>
+                </a:r>
+              </a:p>
+              <a:p>
+                <a:pPr>
+                  <a:lnSpc>
+                    <a:spcPts val="1425"/>
+                  </a:lnSpc>
+                  <a:buNone/>
+                </a:pPr>
+                <a:r>
+                  <a:rPr lang="en-US" altLang="ko-KR" sz="1100" b="0">
+                    <a:solidFill>
+                      <a:srgbClr val="BBBEBF"/>
+                    </a:solidFill>
+                    <a:effectLst/>
+                    <a:latin typeface="Consolas" panose="020B0609020204030204" pitchFamily="49" charset="0"/>
+                  </a:rPr>
+                  <a:t>    </a:t>
+                </a:r>
+                <a:r>
+                  <a:rPr lang="en-US" altLang="ko-KR" sz="1100" b="0">
+                    <a:solidFill>
+                      <a:srgbClr val="7EE787"/>
+                    </a:solidFill>
+                    <a:effectLst/>
+                    <a:latin typeface="Consolas" panose="020B0609020204030204" pitchFamily="49" charset="0"/>
+                  </a:rPr>
+                  <a:t>level</a:t>
+                </a:r>
+                <a:r>
+                  <a:rPr lang="en-US" altLang="ko-KR" sz="1100" b="0">
+                    <a:solidFill>
+                      <a:srgbClr val="BBBEBF"/>
+                    </a:solidFill>
+                    <a:effectLst/>
+                    <a:latin typeface="Consolas" panose="020B0609020204030204" pitchFamily="49" charset="0"/>
+                  </a:rPr>
+                  <a:t>:</a:t>
+                </a:r>
+              </a:p>
+              <a:p>
+                <a:pPr>
+                  <a:lnSpc>
+                    <a:spcPts val="1425"/>
+                  </a:lnSpc>
+                  <a:buNone/>
+                </a:pPr>
+                <a:r>
+                  <a:rPr lang="en-US" altLang="ko-KR" sz="1100" b="0">
+                    <a:solidFill>
+                      <a:srgbClr val="BBBEBF"/>
+                    </a:solidFill>
+                    <a:effectLst/>
+                    <a:latin typeface="Consolas" panose="020B0609020204030204" pitchFamily="49" charset="0"/>
+                  </a:rPr>
+                  <a:t>        </a:t>
+                </a:r>
+                <a:r>
+                  <a:rPr lang="en-US" altLang="ko-KR" sz="1100" b="0">
+                    <a:solidFill>
+                      <a:srgbClr val="7EE787"/>
+                    </a:solidFill>
+                    <a:effectLst/>
+                    <a:latin typeface="Consolas" panose="020B0609020204030204" pitchFamily="49" charset="0"/>
+                  </a:rPr>
+                  <a:t>org.springfaorwork.cache</a:t>
+                </a:r>
+                <a:r>
+                  <a:rPr lang="en-US" altLang="ko-KR" sz="1100" b="0">
+                    <a:solidFill>
+                      <a:srgbClr val="BBBEBF"/>
+                    </a:solidFill>
+                    <a:effectLst/>
+                    <a:latin typeface="Consolas" panose="020B0609020204030204" pitchFamily="49" charset="0"/>
+                  </a:rPr>
+                  <a:t>: </a:t>
+                </a:r>
+                <a:r>
+                  <a:rPr lang="en-US" altLang="ko-KR" sz="1100" b="0">
+                    <a:solidFill>
+                      <a:srgbClr val="A5D6FF"/>
+                    </a:solidFill>
+                    <a:effectLst/>
+                    <a:latin typeface="Consolas" panose="020B0609020204030204" pitchFamily="49" charset="0"/>
+                  </a:rPr>
+                  <a:t>debug</a:t>
+                </a:r>
+                <a:endParaRPr lang="en-US" altLang="ko-KR" sz="1100" b="0">
+                  <a:solidFill>
+                    <a:srgbClr val="BBBEBF"/>
+                  </a:solidFill>
+                  <a:effectLst/>
+                  <a:latin typeface="Consolas" panose="020B0609020204030204" pitchFamily="49" charset="0"/>
+                </a:endParaRPr>
+              </a:p>
+            </p:txBody>
+          </p:sp>
+          <p:sp>
+            <p:nvSpPr>
+              <p:cNvPr id="5" name="직사각형 4">
+                <a:extLst>
+                  <a:ext uri="{FF2B5EF4-FFF2-40B4-BE49-F238E27FC236}">
+                    <a16:creationId xmlns:a16="http://schemas.microsoft.com/office/drawing/2014/main" id="{EC69CC99-6291-BBDA-804D-BAA37D93F134}"/>
+                  </a:ext>
+                </a:extLst>
+              </p:cNvPr>
+              <p:cNvSpPr/>
+              <p:nvPr/>
+            </p:nvSpPr>
+            <p:spPr>
+              <a:xfrm>
+                <a:off x="1902691" y="5237018"/>
+                <a:ext cx="1616364" cy="212437"/>
+              </a:xfrm>
+              <a:prstGeom prst="rect">
+                <a:avLst/>
+              </a:prstGeom>
+              <a:noFill/>
+              <a:ln>
                 <a:solidFill>
                   <a:srgbClr val="FF0000"/>
                 </a:solidFill>
-              </a:rPr>
-              <a:t>Docker</a:t>
-            </a:r>
-            <a:r>
-              <a:rPr lang="ko-KR" altLang="en-US" sz="1000" b="1">
-                <a:solidFill>
-                  <a:srgbClr val="FF0000"/>
-                </a:solidFill>
-              </a:rPr>
-              <a:t>를 설치하기 위한 </a:t>
-            </a:r>
-            <a:r>
-              <a:rPr lang="en-US" altLang="ko-KR" sz="1000" b="1">
-                <a:solidFill>
-                  <a:srgbClr val="FF0000"/>
-                </a:solidFill>
-              </a:rPr>
-              <a:t>apt repository </a:t>
-            </a:r>
-            <a:r>
-              <a:rPr lang="ko-KR" altLang="en-US" sz="1000" b="1">
-                <a:solidFill>
-                  <a:srgbClr val="FF0000"/>
-                </a:solidFill>
-              </a:rPr>
-              <a:t>설정 셋팅</a:t>
-            </a:r>
-            <a:endParaRPr lang="en-US" altLang="ko-KR" sz="1000" b="1">
-              <a:solidFill>
-                <a:srgbClr val="FF0000"/>
-              </a:solidFill>
-            </a:endParaRPr>
-          </a:p>
-          <a:p>
-            <a:r>
-              <a:rPr lang="en-US" altLang="ko-KR" sz="1000"/>
-              <a:t>sudo apt remove $(dpkg --get-selections docker.io docker-compose docker-compose-v2 docker-doc docker-buildx podman-docker containerd runc | cut -f1)</a:t>
-            </a:r>
-          </a:p>
-          <a:p>
-            <a:r>
-              <a:rPr lang="en-US" altLang="ko-KR" sz="1000"/>
-              <a:t>sudo apt update</a:t>
-            </a:r>
-          </a:p>
-          <a:p>
-            <a:r>
-              <a:rPr lang="en-US" altLang="ko-KR" sz="1000"/>
-              <a:t>sudo apt install ca-certificates curl</a:t>
-            </a:r>
-          </a:p>
-          <a:p>
-            <a:r>
-              <a:rPr lang="nb-NO" altLang="ko-KR" sz="1000"/>
-              <a:t>sudo install -m 0755 -d /etc/apt/keyrings</a:t>
-            </a:r>
-          </a:p>
-          <a:p>
-            <a:r>
-              <a:rPr lang="en-US" altLang="ko-KR" sz="1000"/>
-              <a:t>sudo curl -fsSL </a:t>
-            </a:r>
-            <a:r>
-              <a:rPr lang="en-US" altLang="ko-KR" sz="1000">
-                <a:hlinkClick r:id="rId2"/>
-              </a:rPr>
-              <a:t>https://download.docker.com/linux/ubuntu/gpg -o /etc/apt/keyrings/docker.asc</a:t>
-            </a:r>
-            <a:endParaRPr lang="en-US" altLang="ko-KR" sz="1000"/>
-          </a:p>
-          <a:p>
-            <a:r>
-              <a:rPr lang="en-US" altLang="ko-KR" sz="1000"/>
-              <a:t>sudo chmod a+r /etc/apt/keyrings/docker.asc</a:t>
-            </a:r>
-          </a:p>
-          <a:p>
-            <a:endParaRPr lang="en-US" altLang="ko-KR" sz="1000"/>
-          </a:p>
-          <a:p>
-            <a:r>
-              <a:rPr lang="en-US" altLang="ko-KR" sz="1000"/>
-              <a:t># Add the repository to Apt sources:</a:t>
-            </a:r>
-          </a:p>
-          <a:p>
-            <a:r>
-              <a:rPr lang="en-US" altLang="ko-KR" sz="1000"/>
-              <a:t>sudo tee /etc/apt/sources.list.d/docker.sources &lt;&lt;EOF</a:t>
-            </a:r>
-          </a:p>
-          <a:p>
-            <a:r>
-              <a:rPr lang="en-US" altLang="ko-KR" sz="1000"/>
-              <a:t>Types: deb</a:t>
-            </a:r>
-          </a:p>
-          <a:p>
-            <a:r>
-              <a:rPr lang="en-US" altLang="ko-KR" sz="1000"/>
-              <a:t>URIs: https://download.docker.com/linux/ubuntu</a:t>
-            </a:r>
-          </a:p>
-          <a:p>
-            <a:r>
-              <a:rPr lang="en-US" altLang="ko-KR" sz="1000"/>
-              <a:t>Suites: $(. /etc/os-release &amp;&amp; echo "${UBUNTU_CODENAME:-$VERSION_CODENAME}")</a:t>
-            </a:r>
-          </a:p>
-          <a:p>
-            <a:r>
-              <a:rPr lang="en-US" altLang="ko-KR" sz="1000"/>
-              <a:t>Components: stable</a:t>
-            </a:r>
-          </a:p>
-          <a:p>
-            <a:r>
-              <a:rPr lang="en-US" altLang="ko-KR" sz="1000"/>
-              <a:t>Architectures: $(dpkg --print-architecture)</a:t>
-            </a:r>
-          </a:p>
-          <a:p>
-            <a:r>
-              <a:rPr lang="en-US" altLang="ko-KR" sz="1000"/>
-              <a:t>Signed-By: /etc/apt/keyrings/docker.asc</a:t>
-            </a:r>
-          </a:p>
-          <a:p>
-            <a:r>
-              <a:rPr lang="en-US" altLang="ko-KR" sz="1000"/>
-              <a:t>EOF</a:t>
-            </a:r>
-          </a:p>
-          <a:p>
-            <a:endParaRPr lang="en-US" altLang="ko-KR" sz="1000"/>
-          </a:p>
-          <a:p>
-            <a:r>
-              <a:rPr lang="en-US" altLang="ko-KR" sz="1000"/>
-              <a:t>sudo apt update</a:t>
-            </a:r>
-          </a:p>
-          <a:p>
-            <a:endParaRPr lang="en-US" altLang="ko-KR" sz="1000"/>
-          </a:p>
-          <a:p>
-            <a:r>
-              <a:rPr lang="en-US" altLang="ko-KR" sz="1000" b="1">
-                <a:solidFill>
-                  <a:srgbClr val="FF0000"/>
-                </a:solidFill>
-              </a:rPr>
-              <a:t>Docker </a:t>
-            </a:r>
-            <a:r>
-              <a:rPr lang="ko-KR" altLang="en-US" sz="1000" b="1">
-                <a:solidFill>
-                  <a:srgbClr val="FF0000"/>
-                </a:solidFill>
-              </a:rPr>
-              <a:t>설치</a:t>
-            </a:r>
-            <a:endParaRPr lang="en-US" altLang="ko-KR" sz="1000" b="1">
-              <a:solidFill>
-                <a:srgbClr val="FF0000"/>
-              </a:solidFill>
-            </a:endParaRPr>
-          </a:p>
-          <a:p>
-            <a:r>
-              <a:rPr lang="en-US" altLang="ko-KR" sz="1000"/>
-              <a:t>sudo apt install docker-ce docker-ce-cli containerd.io docker-buildx-plugin docker-compose-plugin</a:t>
-            </a:r>
-          </a:p>
-          <a:p>
-            <a:endParaRPr lang="en-US" altLang="ko-KR" sz="1000"/>
-          </a:p>
-          <a:p>
-            <a:r>
-              <a:rPr lang="en-US" altLang="ko-KR" sz="1000" b="1">
-                <a:solidFill>
-                  <a:srgbClr val="FF0000"/>
-                </a:solidFill>
-              </a:rPr>
-              <a:t>Docker </a:t>
-            </a:r>
-            <a:r>
-              <a:rPr lang="ko-KR" altLang="en-US" sz="1000" b="1">
-                <a:solidFill>
-                  <a:srgbClr val="FF0000"/>
-                </a:solidFill>
-              </a:rPr>
-              <a:t>상태 확인</a:t>
-            </a:r>
-            <a:endParaRPr lang="en-US" altLang="ko-KR" sz="1000" b="1">
-              <a:solidFill>
-                <a:srgbClr val="FF0000"/>
-              </a:solidFill>
-            </a:endParaRPr>
-          </a:p>
-          <a:p>
-            <a:r>
-              <a:rPr lang="en-US" altLang="ko-KR" sz="1000"/>
-              <a:t>sudo systemctl status docker</a:t>
-            </a:r>
-            <a:endParaRPr lang="ko-KR" altLang="en-US" sz="1000"/>
-          </a:p>
-        </p:txBody>
-      </p:sp>
-      <p:sp>
-        <p:nvSpPr>
-          <p:cNvPr id="7" name="TextBox 6">
-            <a:extLst>
-              <a:ext uri="{FF2B5EF4-FFF2-40B4-BE49-F238E27FC236}">
-                <a16:creationId xmlns:a16="http://schemas.microsoft.com/office/drawing/2014/main" id="{E1B0DD8A-EBF3-D983-B75C-AAF296549208}"/>
-              </a:ext>
-            </a:extLst>
-          </p:cNvPr>
-          <p:cNvSpPr txBox="1"/>
-          <p:nvPr/>
-        </p:nvSpPr>
-        <p:spPr>
-          <a:xfrm>
-            <a:off x="7324436" y="3020291"/>
-            <a:ext cx="4729019" cy="369332"/>
-          </a:xfrm>
-          <a:prstGeom prst="rect">
-            <a:avLst/>
-          </a:prstGeom>
-          <a:noFill/>
-        </p:spPr>
-        <p:txBody>
-          <a:bodyPr wrap="square" rtlCol="0">
-            <a:spAutoFit/>
-          </a:bodyPr>
-          <a:lstStyle/>
-          <a:p>
-            <a:r>
-              <a:rPr lang="ko-KR" altLang="en-US"/>
-              <a:t>설치는 </a:t>
-            </a:r>
-            <a:r>
-              <a:rPr lang="en-US" altLang="ko-KR"/>
-              <a:t>docker install</a:t>
-            </a:r>
-            <a:r>
-              <a:rPr lang="ko-KR" altLang="en-US"/>
-              <a:t> 사이트를 확인하자</a:t>
-            </a:r>
-          </a:p>
-        </p:txBody>
-      </p:sp>
+              </a:ln>
+            </p:spPr>
+            <p:style>
+              <a:lnRef idx="2">
+                <a:schemeClr val="accent1">
+                  <a:shade val="15000"/>
+                </a:schemeClr>
+              </a:lnRef>
+              <a:fillRef idx="1">
+                <a:schemeClr val="accent1"/>
+              </a:fillRef>
+              <a:effectRef idx="0">
+                <a:schemeClr val="accent1"/>
+              </a:effectRef>
+              <a:fontRef idx="minor">
+                <a:schemeClr val="lt1"/>
+              </a:fontRef>
+            </p:style>
+            <p:txBody>
+              <a:bodyPr rtlCol="0" anchor="ctr"/>
+              <a:lstStyle/>
+              <a:p>
+                <a:pPr algn="ctr"/>
+                <a:endParaRPr lang="ko-KR" altLang="en-US"/>
+              </a:p>
+            </p:txBody>
+          </p:sp>
+        </p:grpSp>
+        <p:sp>
+          <p:nvSpPr>
+            <p:cNvPr id="7" name="직사각형 6">
+              <a:extLst>
+                <a:ext uri="{FF2B5EF4-FFF2-40B4-BE49-F238E27FC236}">
+                  <a16:creationId xmlns:a16="http://schemas.microsoft.com/office/drawing/2014/main" id="{F6515573-CCA3-031F-C6D2-6C57E8559A03}"/>
+                </a:ext>
+              </a:extLst>
+            </p:cNvPr>
+            <p:cNvSpPr/>
+            <p:nvPr/>
+          </p:nvSpPr>
+          <p:spPr>
+            <a:xfrm>
+              <a:off x="4608945" y="4322618"/>
+              <a:ext cx="4950691" cy="1302327"/>
+            </a:xfrm>
+            <a:prstGeom prst="rect">
+              <a:avLst/>
+            </a:prstGeom>
+          </p:spPr>
+          <p:style>
+            <a:lnRef idx="2">
+              <a:schemeClr val="accent1">
+                <a:shade val="15000"/>
+              </a:schemeClr>
+            </a:lnRef>
+            <a:fillRef idx="1">
+              <a:schemeClr val="accent1"/>
+            </a:fillRef>
+            <a:effectRef idx="0">
+              <a:schemeClr val="accent1"/>
+            </a:effectRef>
+            <a:fontRef idx="minor">
+              <a:schemeClr val="lt1"/>
+            </a:fontRef>
+          </p:style>
+          <p:txBody>
+            <a:bodyPr rtlCol="0" anchor="ctr"/>
+            <a:lstStyle/>
+            <a:p>
+              <a:pPr algn="ctr"/>
+              <a:r>
+                <a:rPr lang="en-US" altLang="ko-KR" sz="1400"/>
+                <a:t>Prod </a:t>
+              </a:r>
+              <a:r>
+                <a:rPr lang="ko-KR" altLang="en-US" sz="1400"/>
+                <a:t>환경의 </a:t>
+              </a:r>
+              <a:r>
+                <a:rPr lang="en-US" altLang="ko-KR" sz="1400"/>
+                <a:t>application.yml </a:t>
+              </a:r>
+              <a:r>
+                <a:rPr lang="ko-KR" altLang="en-US" sz="1400"/>
+                <a:t>도</a:t>
+              </a:r>
+              <a:br>
+                <a:rPr lang="en-US" altLang="ko-KR" sz="1400"/>
+              </a:br>
+              <a:r>
+                <a:rPr lang="en-US" altLang="ko-KR" sz="1400"/>
+                <a:t>docker DNS</a:t>
+              </a:r>
+              <a:r>
+                <a:rPr lang="ko-KR" altLang="en-US" sz="1400"/>
+                <a:t>로 통신되도록 동일하게 수정해준다</a:t>
+              </a:r>
+              <a:r>
+                <a:rPr lang="en-US" altLang="ko-KR" sz="1400"/>
+                <a:t>.</a:t>
+              </a:r>
+              <a:endParaRPr lang="ko-KR" altLang="en-US" sz="1400"/>
+            </a:p>
+          </p:txBody>
+        </p:sp>
+      </p:grpSp>
     </p:spTree>
     <p:extLst>
       <p:ext uri="{BB962C8B-B14F-4D97-AF65-F5344CB8AC3E}">
-        <p14:creationId xmlns:p14="http://schemas.microsoft.com/office/powerpoint/2010/main" val="760910136"/>
+        <p14:creationId xmlns:p14="http://schemas.microsoft.com/office/powerpoint/2010/main" val="3728633672"/>
       </p:ext>
     </p:extLst>
   </p:cSld>
@@ -9715,7 +11441,7 @@
           <p:cNvPr id="2" name="제목 1">
             <a:extLst>
               <a:ext uri="{FF2B5EF4-FFF2-40B4-BE49-F238E27FC236}">
-                <a16:creationId xmlns:a16="http://schemas.microsoft.com/office/drawing/2014/main" id="{B54FB328-5D32-D104-3F4E-070129B32618}"/>
+                <a16:creationId xmlns:a16="http://schemas.microsoft.com/office/drawing/2014/main" id="{C9BE4645-9C39-326A-3E12-DC60E02C1564}"/>
               </a:ext>
             </a:extLst>
           </p:cNvPr>
@@ -9728,28 +11454,34 @@
         </p:nvSpPr>
         <p:spPr/>
         <p:txBody>
-          <a:bodyPr>
-            <a:normAutofit/>
-          </a:bodyPr>
+          <a:bodyPr/>
           <a:lstStyle/>
           <a:p>
             <a:r>
-              <a:rPr lang="en-US" altLang="ko-KR" sz="4000"/>
-              <a:t>EC2 Redis </a:t>
-            </a:r>
-            <a:r>
-              <a:rPr lang="ko-KR" altLang="en-US" sz="4000"/>
-              <a:t>및 실행중인 애플리케이션 중지</a:t>
+              <a:rPr lang="en-US" altLang="ko-KR"/>
+              <a:t>EC2 </a:t>
+            </a:r>
+            <a:r>
+              <a:rPr lang="ko-KR" altLang="en-US"/>
+              <a:t>시스템에 </a:t>
+            </a:r>
+            <a:r>
+              <a:rPr lang="en-US" altLang="ko-KR"/>
+              <a:t>Docker </a:t>
+            </a:r>
+            <a:r>
+              <a:rPr lang="ko-KR" altLang="en-US"/>
+              <a:t>설치하기</a:t>
             </a:r>
           </a:p>
         </p:txBody>
       </p:sp>
       <p:sp>
         <p:nvSpPr>
-          <p:cNvPr id="4" name="TextBox 3">
+          <p:cNvPr id="6" name="TextBox 5">
             <a:extLst>
               <a:ext uri="{FF2B5EF4-FFF2-40B4-BE49-F238E27FC236}">
-                <a16:creationId xmlns:a16="http://schemas.microsoft.com/office/drawing/2014/main" id="{7CB7E580-3C4B-4C12-68BC-2D4A319DCB63}"/>
+                <a16:creationId xmlns:a16="http://schemas.microsoft.com/office/drawing/2014/main" id="{400FFA20-1DC5-B98B-9A07-69D5E7E0127C}"/>
               </a:ext>
             </a:extLst>
           </p:cNvPr>
@@ -9758,8 +11490,8 @@
         </p:nvSpPr>
         <p:spPr>
           <a:xfrm>
-            <a:off x="1097280" y="1737360"/>
-            <a:ext cx="6096000" cy="1384995"/>
+            <a:off x="1163781" y="1816019"/>
+            <a:ext cx="10400145" cy="4062651"/>
           </a:xfrm>
           <a:prstGeom prst="rect">
             <a:avLst/>
@@ -9773,14 +11505,38 @@
           <a:lstStyle/>
           <a:p>
             <a:r>
-              <a:rPr lang="ko-KR" altLang="en-US" sz="1400" b="1">
+              <a:rPr lang="en-US" altLang="ko-KR" sz="1000" b="1">
                 <a:solidFill>
                   <a:srgbClr val="FF0000"/>
                 </a:solidFill>
               </a:rPr>
-              <a:t>레디스 중지</a:t>
-            </a:r>
-            <a:endParaRPr lang="en-US" altLang="ko-KR" sz="1400" b="1">
+              <a:t>Docker</a:t>
+            </a:r>
+            <a:r>
+              <a:rPr lang="ko-KR" altLang="en-US" sz="1000" b="1">
+                <a:solidFill>
+                  <a:srgbClr val="FF0000"/>
+                </a:solidFill>
+              </a:rPr>
+              <a:t>를 설치하기 위한 </a:t>
+            </a:r>
+            <a:r>
+              <a:rPr lang="en-US" altLang="ko-KR" sz="1000" b="1">
+                <a:solidFill>
+                  <a:srgbClr val="FF0000"/>
+                </a:solidFill>
+              </a:rPr>
+              <a:t>apt repository </a:t>
+            </a:r>
+            <a:r>
+              <a:rPr lang="ko-KR" altLang="en-US" sz="1000" b="1">
+                <a:solidFill>
+                  <a:srgbClr val="FF0000"/>
+                </a:solidFill>
+              </a:rPr>
+              <a:t>설정 셋팅</a:t>
+            </a:r>
+            <a:endParaRPr lang="en-US" altLang="ko-KR" sz="1000" b="1">
               <a:solidFill>
                 <a:srgbClr val="FF0000"/>
               </a:solidFill>
@@ -9788,23 +11544,134 @@
           </a:p>
           <a:p>
             <a:r>
-              <a:rPr lang="en-US" altLang="ko-KR" sz="1400"/>
-              <a:t>sudo systemctl stop redis</a:t>
-            </a:r>
-          </a:p>
-          <a:p>
-            <a:endParaRPr lang="en-US" altLang="ko-KR" sz="1400"/>
-          </a:p>
-          <a:p>
-            <a:r>
-              <a:rPr lang="ko-KR" altLang="en-US" sz="1400" b="1">
+              <a:rPr lang="en-US" altLang="ko-KR" sz="1000"/>
+              <a:t>sudo apt remove $(dpkg --get-selections docker.io docker-compose docker-compose-v2 docker-doc docker-buildx podman-docker containerd runc | cut -f1)</a:t>
+            </a:r>
+          </a:p>
+          <a:p>
+            <a:r>
+              <a:rPr lang="en-US" altLang="ko-KR" sz="1000"/>
+              <a:t>sudo apt update</a:t>
+            </a:r>
+          </a:p>
+          <a:p>
+            <a:r>
+              <a:rPr lang="en-US" altLang="ko-KR" sz="1000"/>
+              <a:t>sudo apt install ca-certificates curl</a:t>
+            </a:r>
+          </a:p>
+          <a:p>
+            <a:r>
+              <a:rPr lang="nb-NO" altLang="ko-KR" sz="1000"/>
+              <a:t>sudo install -m 0755 -d /etc/apt/keyrings</a:t>
+            </a:r>
+          </a:p>
+          <a:p>
+            <a:r>
+              <a:rPr lang="en-US" altLang="ko-KR" sz="1000"/>
+              <a:t>sudo curl -fsSL </a:t>
+            </a:r>
+            <a:r>
+              <a:rPr lang="en-US" altLang="ko-KR" sz="1000">
+                <a:hlinkClick r:id="rId2"/>
+              </a:rPr>
+              <a:t>https://download.docker.com/linux/ubuntu/gpg -o /etc/apt/keyrings/docker.asc</a:t>
+            </a:r>
+            <a:endParaRPr lang="en-US" altLang="ko-KR" sz="1000"/>
+          </a:p>
+          <a:p>
+            <a:r>
+              <a:rPr lang="en-US" altLang="ko-KR" sz="1000"/>
+              <a:t>sudo chmod a+r /etc/apt/keyrings/docker.asc</a:t>
+            </a:r>
+          </a:p>
+          <a:p>
+            <a:endParaRPr lang="en-US" altLang="ko-KR" sz="1000"/>
+          </a:p>
+          <a:p>
+            <a:r>
+              <a:rPr lang="en-US" altLang="ko-KR" sz="1000"/>
+              <a:t># Add the repository to Apt sources:</a:t>
+            </a:r>
+          </a:p>
+          <a:p>
+            <a:r>
+              <a:rPr lang="en-US" altLang="ko-KR" sz="1000"/>
+              <a:t>sudo tee /etc/apt/sources.list.d/docker.sources &lt;&lt;EOF</a:t>
+            </a:r>
+          </a:p>
+          <a:p>
+            <a:r>
+              <a:rPr lang="en-US" altLang="ko-KR" sz="1000"/>
+              <a:t>Types: deb</a:t>
+            </a:r>
+          </a:p>
+          <a:p>
+            <a:r>
+              <a:rPr lang="en-US" altLang="ko-KR" sz="1000"/>
+              <a:t>URIs: https://download.docker.com/linux/ubuntu</a:t>
+            </a:r>
+          </a:p>
+          <a:p>
+            <a:r>
+              <a:rPr lang="en-US" altLang="ko-KR" sz="1000"/>
+              <a:t>Suites: $(. /etc/os-release &amp;&amp; echo "${UBUNTU_CODENAME:-$VERSION_CODENAME}")</a:t>
+            </a:r>
+          </a:p>
+          <a:p>
+            <a:r>
+              <a:rPr lang="en-US" altLang="ko-KR" sz="1000"/>
+              <a:t>Components: stable</a:t>
+            </a:r>
+          </a:p>
+          <a:p>
+            <a:r>
+              <a:rPr lang="en-US" altLang="ko-KR" sz="1000"/>
+              <a:t>Architectures: $(dpkg --print-architecture)</a:t>
+            </a:r>
+          </a:p>
+          <a:p>
+            <a:r>
+              <a:rPr lang="en-US" altLang="ko-KR" sz="1000"/>
+              <a:t>Signed-By: /etc/apt/keyrings/docker.asc</a:t>
+            </a:r>
+          </a:p>
+          <a:p>
+            <a:r>
+              <a:rPr lang="en-US" altLang="ko-KR" sz="1000"/>
+              <a:t>EOF</a:t>
+            </a:r>
+          </a:p>
+          <a:p>
+            <a:endParaRPr lang="en-US" altLang="ko-KR" sz="1000"/>
+          </a:p>
+          <a:p>
+            <a:r>
+              <a:rPr lang="en-US" altLang="ko-KR" sz="1000"/>
+              <a:t>sudo apt update</a:t>
+            </a:r>
+          </a:p>
+          <a:p>
+            <a:endParaRPr lang="en-US" altLang="ko-KR" sz="1000"/>
+          </a:p>
+          <a:p>
+            <a:r>
+              <a:rPr lang="en-US" altLang="ko-KR" sz="1000" b="1">
                 <a:solidFill>
                   <a:srgbClr val="FF0000"/>
                 </a:solidFill>
               </a:rPr>
-              <a:t>스프링 애플리케이션 중지</a:t>
-            </a:r>
-            <a:endParaRPr lang="en-US" altLang="ko-KR" sz="1400" b="1">
+              <a:t>Docker </a:t>
+            </a:r>
+            <a:r>
+              <a:rPr lang="ko-KR" altLang="en-US" sz="1000" b="1">
+                <a:solidFill>
+                  <a:srgbClr val="FF0000"/>
+                </a:solidFill>
+              </a:rPr>
+              <a:t>설치</a:t>
+            </a:r>
+            <a:endParaRPr lang="en-US" altLang="ko-KR" sz="1000" b="1">
               <a:solidFill>
                 <a:srgbClr val="FF0000"/>
               </a:solidFill>
@@ -9812,99 +11679,92 @@
           </a:p>
           <a:p>
             <a:r>
-              <a:rPr lang="en-US" altLang="ko-KR" sz="1400"/>
-              <a:t>sudo lsof -i:8080</a:t>
-            </a:r>
-          </a:p>
-          <a:p>
-            <a:r>
-              <a:rPr lang="en-US" altLang="ko-KR" sz="1400"/>
-              <a:t>sudo</a:t>
-            </a:r>
-            <a:r>
-              <a:rPr lang="ko-KR" altLang="en-US" sz="1400"/>
-              <a:t> </a:t>
-            </a:r>
-            <a:r>
-              <a:rPr lang="en-US" altLang="ko-KR" sz="1400"/>
-              <a:t>kill -9 {</a:t>
-            </a:r>
-            <a:r>
-              <a:rPr lang="ko-KR" altLang="en-US" sz="1400"/>
-              <a:t>애플리케이션 프로세스 </a:t>
-            </a:r>
-            <a:r>
-              <a:rPr lang="en-US" altLang="ko-KR" sz="1400"/>
-              <a:t>PID}</a:t>
-            </a:r>
-            <a:endParaRPr lang="ko-KR" altLang="en-US" sz="1400"/>
+              <a:rPr lang="en-US" altLang="ko-KR" sz="1000"/>
+              <a:t>sudo apt install docker-ce docker-ce-cli containerd.io docker-buildx-plugin docker-compose-plugin</a:t>
+            </a:r>
+          </a:p>
+          <a:p>
+            <a:endParaRPr lang="en-US" altLang="ko-KR" sz="1000"/>
+          </a:p>
+          <a:p>
+            <a:r>
+              <a:rPr lang="en-US" altLang="ko-KR" sz="1000" b="1">
+                <a:solidFill>
+                  <a:srgbClr val="FF0000"/>
+                </a:solidFill>
+              </a:rPr>
+              <a:t>Docker </a:t>
+            </a:r>
+            <a:r>
+              <a:rPr lang="ko-KR" altLang="en-US" sz="1000" b="1">
+                <a:solidFill>
+                  <a:srgbClr val="FF0000"/>
+                </a:solidFill>
+              </a:rPr>
+              <a:t>상태 확인</a:t>
+            </a:r>
+            <a:endParaRPr lang="en-US" altLang="ko-KR" sz="1000" b="1">
+              <a:solidFill>
+                <a:srgbClr val="FF0000"/>
+              </a:solidFill>
+            </a:endParaRPr>
+          </a:p>
+          <a:p>
+            <a:r>
+              <a:rPr lang="en-US" altLang="ko-KR" sz="1000"/>
+              <a:t>sudo systemctl status docker</a:t>
+            </a:r>
+            <a:endParaRPr lang="ko-KR" altLang="en-US" sz="1000"/>
           </a:p>
         </p:txBody>
       </p:sp>
-      <p:pic>
-        <p:nvPicPr>
-          <p:cNvPr id="6" name="그림 5">
+      <p:sp>
+        <p:nvSpPr>
+          <p:cNvPr id="7" name="TextBox 6">
             <a:extLst>
               <a:ext uri="{FF2B5EF4-FFF2-40B4-BE49-F238E27FC236}">
-                <a16:creationId xmlns:a16="http://schemas.microsoft.com/office/drawing/2014/main" id="{325EE700-5CEB-9EEC-AB37-DA18C1D5EDFB}"/>
+                <a16:creationId xmlns:a16="http://schemas.microsoft.com/office/drawing/2014/main" id="{E1B0DD8A-EBF3-D983-B75C-AAF296549208}"/>
               </a:ext>
             </a:extLst>
           </p:cNvPr>
-          <p:cNvPicPr>
-            <a:picLocks noChangeAspect="1"/>
-          </p:cNvPicPr>
+          <p:cNvSpPr txBox="1"/>
           <p:nvPr/>
-        </p:nvPicPr>
-        <p:blipFill>
-          <a:blip r:embed="rId2"/>
-          <a:stretch>
-            <a:fillRect/>
-          </a:stretch>
-        </p:blipFill>
+        </p:nvSpPr>
         <p:spPr>
           <a:xfrm>
-            <a:off x="1134960" y="3287908"/>
-            <a:ext cx="6020640" cy="895475"/>
+            <a:off x="7324436" y="3020291"/>
+            <a:ext cx="4729019" cy="369332"/>
           </a:xfrm>
           <a:prstGeom prst="rect">
             <a:avLst/>
           </a:prstGeom>
+          <a:noFill/>
         </p:spPr>
-      </p:pic>
-      <p:pic>
-        <p:nvPicPr>
-          <p:cNvPr id="8" name="그림 7">
-            <a:extLst>
-              <a:ext uri="{FF2B5EF4-FFF2-40B4-BE49-F238E27FC236}">
-                <a16:creationId xmlns:a16="http://schemas.microsoft.com/office/drawing/2014/main" id="{3C2C54D9-B0B1-7F51-402B-250BC720F792}"/>
-              </a:ext>
-            </a:extLst>
-          </p:cNvPr>
-          <p:cNvPicPr>
-            <a:picLocks noChangeAspect="1"/>
-          </p:cNvPicPr>
-          <p:nvPr/>
-        </p:nvPicPr>
-        <p:blipFill>
-          <a:blip r:embed="rId3"/>
-          <a:stretch>
-            <a:fillRect/>
-          </a:stretch>
-        </p:blipFill>
-        <p:spPr>
-          <a:xfrm>
-            <a:off x="1134960" y="4348936"/>
-            <a:ext cx="10602805" cy="342948"/>
-          </a:xfrm>
-          <a:prstGeom prst="rect">
-            <a:avLst/>
-          </a:prstGeom>
-        </p:spPr>
-      </p:pic>
+        <p:txBody>
+          <a:bodyPr wrap="square" rtlCol="0">
+            <a:spAutoFit/>
+          </a:bodyPr>
+          <a:lstStyle/>
+          <a:p>
+            <a:r>
+              <a:rPr lang="ko-KR" altLang="en-US"/>
+              <a:t>설치는 </a:t>
+            </a:r>
+            <a:r>
+              <a:rPr lang="en-US" altLang="ko-KR"/>
+              <a:t>docker install</a:t>
+            </a:r>
+            <a:r>
+              <a:rPr lang="ko-KR" altLang="en-US"/>
+              <a:t> 사이트를 확인하자</a:t>
+            </a:r>
+          </a:p>
+        </p:txBody>
+      </p:sp>
     </p:spTree>
     <p:extLst>
       <p:ext uri="{BB962C8B-B14F-4D97-AF65-F5344CB8AC3E}">
-        <p14:creationId xmlns:p14="http://schemas.microsoft.com/office/powerpoint/2010/main" val="3460126114"/>
+        <p14:creationId xmlns:p14="http://schemas.microsoft.com/office/powerpoint/2010/main" val="760910136"/>
       </p:ext>
     </p:extLst>
   </p:cSld>
